--- a/undergrad/slides/modulesix.pptx
+++ b/undergrad/slides/modulesix.pptx
@@ -3824,9 +3824,41 @@
         <p:nvPr/>
       </p:nvGrpSpPr>
       <p:grpSpPr/>
+      <p:sp>
+        <p:nvSpPr>
+          <p:cNvPr id="2" name="Title 1"/>
+          <p:cNvSpPr>
+            <a:spLocks noGrp="1"/>
+          </p:cNvSpPr>
+          <p:nvPr>
+            <p:ph type="title"/>
+          </p:nvPr>
+        </p:nvSpPr>
+        <p:spPr>
+          <a:xfrm>
+            <a:off x="-12191695" y="0"/>
+            <a:ext cx="12191695" cy="914400"/>
+          </a:xfrm>
+        </p:spPr>
+        <p:txBody>
+          <a:bodyPr/>
+          <a:lstStyle/>
+          <a:p>
+            <a:r>
+              <a:t>Module Six: Building with AI</a:t>
+            </a:r>
+          </a:p>
+        </p:txBody>
+      </p:sp>
       <p:grpSp>
         <p:nvGrpSpPr>
-          <p:cNvPr id="2" name="Group 1"/>
+          <p:cNvPr id="3" name="Window ENG3861.EXE">
+            <a:extLst>
+              <a:ext uri="{C183D7F6-B498-43B3-948B-1728B52AA6E4}">
+                <adec:decorative xmlns:adec="http://schemas.microsoft.com/office/drawing/2017/decorative" val="1"/>
+              </a:ext>
+            </a:extLst>
+          </p:cNvPr>
           <p:cNvGrpSpPr/>
           <p:nvPr/>
         </p:nvGrpSpPr>
@@ -3840,7 +3872,7 @@
         </p:grpSpPr>
         <p:sp>
           <p:nvSpPr>
-            <p:cNvPr id="3" name="Rectangle 2"/>
+            <p:cNvPr id="4" name="Rectangle 3"/>
             <p:cNvSpPr/>
             <p:nvPr/>
           </p:nvSpPr>
@@ -3884,7 +3916,7 @@
         </p:sp>
         <p:sp>
           <p:nvSpPr>
-            <p:cNvPr id="4" name="Rectangle 3"/>
+            <p:cNvPr id="5" name="Rectangle 4"/>
             <p:cNvSpPr/>
             <p:nvPr/>
           </p:nvSpPr>
@@ -3930,7 +3962,7 @@
         </p:sp>
         <p:sp>
           <p:nvSpPr>
-            <p:cNvPr id="5" name="Rectangle 4"/>
+            <p:cNvPr id="6" name="Rectangle 5"/>
             <p:cNvSpPr/>
             <p:nvPr/>
           </p:nvSpPr>
@@ -3976,7 +4008,7 @@
         </p:sp>
         <p:sp>
           <p:nvSpPr>
-            <p:cNvPr id="6" name="Rectangle 5"/>
+            <p:cNvPr id="7" name="Rectangle 6"/>
             <p:cNvSpPr/>
             <p:nvPr/>
           </p:nvSpPr>
@@ -4022,7 +4054,7 @@
         </p:sp>
         <p:sp>
           <p:nvSpPr>
-            <p:cNvPr id="7" name="Rectangle 6"/>
+            <p:cNvPr id="8" name="Rectangle 7"/>
             <p:cNvSpPr/>
             <p:nvPr/>
           </p:nvSpPr>
@@ -4068,7 +4100,7 @@
         </p:sp>
         <p:sp>
           <p:nvSpPr>
-            <p:cNvPr id="8" name="Rectangle 7"/>
+            <p:cNvPr id="9" name="Rectangle 8"/>
             <p:cNvSpPr/>
             <p:nvPr/>
           </p:nvSpPr>
@@ -4114,7 +4146,7 @@
         </p:sp>
         <p:sp>
           <p:nvSpPr>
-            <p:cNvPr id="9" name="TextBox 8"/>
+            <p:cNvPr id="10" name="TextBox 9"/>
             <p:cNvSpPr txBox="1"/>
             <p:nvPr/>
           </p:nvSpPr>
@@ -4147,16 +4179,134 @@
           </p:txBody>
         </p:sp>
       </p:grpSp>
+      <p:grpSp>
+        <p:nvGrpSpPr>
+          <p:cNvPr id="11" name="Unit CODE"/>
+          <p:cNvGrpSpPr/>
+          <p:nvPr/>
+        </p:nvGrpSpPr>
+        <p:grpSpPr>
+          <a:xfrm>
+            <a:off x="1371600" y="2560574"/>
+            <a:ext cx="1314450" cy="512064"/>
+            <a:chOff x="1371600" y="2560574"/>
+            <a:chExt cx="1314450" cy="512064"/>
+          </a:xfrm>
+        </p:grpSpPr>
+        <p:sp>
+          <p:nvSpPr>
+            <p:cNvPr id="12" name="Rounded Rectangle 11"/>
+            <p:cNvSpPr/>
+            <p:nvPr/>
+          </p:nvSpPr>
+          <p:spPr>
+            <a:xfrm>
+              <a:off x="1426464" y="2615438"/>
+              <a:ext cx="1259586" cy="457200"/>
+            </a:xfrm>
+            <a:prstGeom prst="roundRect">
+              <a:avLst>
+                <a:gd name="adj" fmla="val 50000"/>
+              </a:avLst>
+            </a:prstGeom>
+            <a:solidFill>
+              <a:srgbClr val="1B1035"/>
+            </a:solidFill>
+            <a:ln>
+              <a:noFill/>
+            </a:ln>
+            <a:effectLst/>
+          </p:spPr>
+          <p:style>
+            <a:lnRef idx="1">
+              <a:schemeClr val="accent1"/>
+            </a:lnRef>
+            <a:fillRef idx="3">
+              <a:schemeClr val="accent1"/>
+            </a:fillRef>
+            <a:effectRef idx="2">
+              <a:schemeClr val="accent1"/>
+            </a:effectRef>
+            <a:fontRef idx="minor">
+              <a:schemeClr val="lt1"/>
+            </a:fontRef>
+          </p:style>
+          <p:txBody>
+            <a:bodyPr rtlCol="0" anchor="ctr"/>
+            <a:lstStyle/>
+            <a:p>
+              <a:pPr algn="ctr"/>
+            </a:p>
+          </p:txBody>
+        </p:sp>
+        <p:sp>
+          <p:nvSpPr>
+            <p:cNvPr id="13" name="Rounded Rectangle 12"/>
+            <p:cNvSpPr/>
+            <p:nvPr/>
+          </p:nvSpPr>
+          <p:spPr>
+            <a:xfrm>
+              <a:off x="1371600" y="2560574"/>
+              <a:ext cx="1259586" cy="457200"/>
+            </a:xfrm>
+            <a:prstGeom prst="roundRect">
+              <a:avLst>
+                <a:gd name="adj" fmla="val 50000"/>
+              </a:avLst>
+            </a:prstGeom>
+            <a:solidFill>
+              <a:srgbClr val="00B894"/>
+            </a:solidFill>
+            <a:ln w="31750">
+              <a:solidFill>
+                <a:srgbClr val="1B1035"/>
+              </a:solidFill>
+            </a:ln>
+            <a:effectLst/>
+          </p:spPr>
+          <p:style>
+            <a:lnRef idx="1">
+              <a:schemeClr val="accent1"/>
+            </a:lnRef>
+            <a:fillRef idx="3">
+              <a:schemeClr val="accent1"/>
+            </a:fillRef>
+            <a:effectRef idx="2">
+              <a:schemeClr val="accent1"/>
+            </a:effectRef>
+            <a:fontRef idx="minor">
+              <a:schemeClr val="lt1"/>
+            </a:fontRef>
+          </p:style>
+          <p:txBody>
+            <a:bodyPr rtlCol="0" anchor="ctr" lIns="0" rIns="0" tIns="0" bIns="0" wrap="none"/>
+            <a:lstStyle/>
+            <a:p>
+              <a:pPr algn="ctr"/>
+              <a:r>
+                <a:rPr sz="1800" b="0" i="0">
+                  <a:solidFill>
+                    <a:srgbClr val="1B1035"/>
+                  </a:solidFill>
+                  <a:latin typeface="Arial Black"/>
+                </a:rPr>
+                <a:t>CODE</a:t>
+              </a:r>
+            </a:p>
+          </p:txBody>
+        </p:sp>
+      </p:grpSp>
       <p:sp>
         <p:nvSpPr>
-          <p:cNvPr id="10" name="TextBox 9"/>
+          <p:cNvPr id="14" name="TextBox 13"/>
           <p:cNvSpPr txBox="1"/>
           <p:nvPr/>
         </p:nvSpPr>
         <p:spPr>
           <a:xfrm>
-            <a:off x="1280160" y="1645920"/>
-            <a:ext cx="9631375" cy="4069080"/>
+            <a:off x="1280160" y="3200654"/>
+            <a:ext cx="9631375" cy="2514346"/>
           </a:xfrm>
           <a:prstGeom prst="rect">
             <a:avLst/>
@@ -4164,21 +4314,10 @@
           <a:noFill/>
         </p:spPr>
         <p:txBody>
-          <a:bodyPr wrap="square" anchor="ctr">
+          <a:bodyPr wrap="square" anchor="t">
             <a:normAutofit/>
           </a:bodyPr>
           <a:lstStyle/>
-          <a:p>
-            <a:r>
-              <a:rPr sz="1800" b="0" i="0">
-                <a:solidFill>
-                  <a:srgbClr val="00B894"/>
-                </a:solidFill>
-                <a:latin typeface="Arial Black"/>
-              </a:rPr>
-              <a:t>CODE</a:t>
-            </a:r>
-          </a:p>
           <a:p>
             <a:r>
               <a:rPr sz="2400" b="0" i="0">
@@ -4240,9 +4379,41 @@
         <p:nvPr/>
       </p:nvGrpSpPr>
       <p:grpSpPr/>
+      <p:sp>
+        <p:nvSpPr>
+          <p:cNvPr id="2" name="Title 1"/>
+          <p:cNvSpPr>
+            <a:spLocks noGrp="1"/>
+          </p:cNvSpPr>
+          <p:nvPr>
+            <p:ph type="title"/>
+          </p:nvPr>
+        </p:nvSpPr>
+        <p:spPr>
+          <a:xfrm>
+            <a:off x="-12191695" y="0"/>
+            <a:ext cx="12191695" cy="914400"/>
+          </a:xfrm>
+        </p:spPr>
+        <p:txBody>
+          <a:bodyPr/>
+          <a:lstStyle/>
+          <a:p>
+            <a:r>
+              <a:t>November 2022: a chatbot could write a limerick</a:t>
+            </a:r>
+          </a:p>
+        </p:txBody>
+      </p:sp>
       <p:grpSp>
         <p:nvGrpSpPr>
-          <p:cNvPr id="2" name="Group 1"/>
+          <p:cNvPr id="3" name="Window image.png">
+            <a:extLst>
+              <a:ext uri="{C183D7F6-B498-43B3-948B-1728B52AA6E4}">
+                <adec:decorative xmlns:adec="http://schemas.microsoft.com/office/drawing/2017/decorative" val="1"/>
+              </a:ext>
+            </a:extLst>
+          </p:cNvPr>
           <p:cNvGrpSpPr/>
           <p:nvPr/>
         </p:nvGrpSpPr>
@@ -4256,7 +4427,7 @@
         </p:grpSpPr>
         <p:sp>
           <p:nvSpPr>
-            <p:cNvPr id="3" name="Rectangle 2"/>
+            <p:cNvPr id="4" name="Rectangle 3"/>
             <p:cNvSpPr/>
             <p:nvPr/>
           </p:nvSpPr>
@@ -4300,7 +4471,7 @@
         </p:sp>
         <p:sp>
           <p:nvSpPr>
-            <p:cNvPr id="4" name="Rectangle 3"/>
+            <p:cNvPr id="5" name="Rectangle 4"/>
             <p:cNvSpPr/>
             <p:nvPr/>
           </p:nvSpPr>
@@ -4346,7 +4517,7 @@
         </p:sp>
         <p:sp>
           <p:nvSpPr>
-            <p:cNvPr id="5" name="Rectangle 4"/>
+            <p:cNvPr id="6" name="Rectangle 5"/>
             <p:cNvSpPr/>
             <p:nvPr/>
           </p:nvSpPr>
@@ -4392,7 +4563,7 @@
         </p:sp>
         <p:sp>
           <p:nvSpPr>
-            <p:cNvPr id="6" name="Rectangle 5"/>
+            <p:cNvPr id="7" name="Rectangle 6"/>
             <p:cNvSpPr/>
             <p:nvPr/>
           </p:nvSpPr>
@@ -4438,7 +4609,7 @@
         </p:sp>
         <p:sp>
           <p:nvSpPr>
-            <p:cNvPr id="7" name="Rectangle 6"/>
+            <p:cNvPr id="8" name="Rectangle 7"/>
             <p:cNvSpPr/>
             <p:nvPr/>
           </p:nvSpPr>
@@ -4484,7 +4655,7 @@
         </p:sp>
         <p:sp>
           <p:nvSpPr>
-            <p:cNvPr id="8" name="Rectangle 7"/>
+            <p:cNvPr id="9" name="Rectangle 8"/>
             <p:cNvSpPr/>
             <p:nvPr/>
           </p:nvSpPr>
@@ -4530,7 +4701,7 @@
         </p:sp>
         <p:sp>
           <p:nvSpPr>
-            <p:cNvPr id="9" name="TextBox 8"/>
+            <p:cNvPr id="10" name="TextBox 9"/>
             <p:cNvSpPr txBox="1"/>
             <p:nvPr/>
           </p:nvSpPr>
@@ -4565,7 +4736,7 @@
       </p:grpSp>
       <p:pic>
         <p:nvPicPr>
-          <p:cNvPr id="10" name="Picture 9" descr="Ethan Mollick post from Nov. 28, 2022: 'a new text model was released for GPT-3 today. AI can now write rhyming poems. And acrostics. And limericks,' with screenshots including a limerick about an otter."/>
+          <p:cNvPr id="11" name="Picture 10" descr="Ethan Mollick post from Nov. 28, 2022: 'a new text model was released for GPT-3 today. AI can now write rhyming poems. And acrostics. And limericks,' with screenshots including a limerick about an otter."/>
           <p:cNvPicPr>
             <a:picLocks noChangeAspect="1"/>
           </p:cNvPicPr>
@@ -4589,13 +4760,13 @@
       </p:pic>
       <p:sp>
         <p:nvSpPr>
-          <p:cNvPr id="11" name="TextBox 10"/>
+          <p:cNvPr id="12" name="TextBox 11"/>
           <p:cNvSpPr txBox="1"/>
           <p:nvPr/>
         </p:nvSpPr>
         <p:spPr>
           <a:xfrm>
-            <a:off x="822960" y="5989320"/>
+            <a:off x="822960" y="5943600"/>
             <a:ext cx="10545775" cy="731520"/>
           </a:xfrm>
           <a:prstGeom prst="rect">
@@ -4648,9 +4819,41 @@
         <p:nvPr/>
       </p:nvGrpSpPr>
       <p:grpSpPr/>
+      <p:sp>
+        <p:nvSpPr>
+          <p:cNvPr id="2" name="Title 1"/>
+          <p:cNvSpPr>
+            <a:spLocks noGrp="1"/>
+          </p:cNvSpPr>
+          <p:nvPr>
+            <p:ph type="title"/>
+          </p:nvPr>
+        </p:nvSpPr>
+        <p:spPr>
+          <a:xfrm>
+            <a:off x="-12191695" y="0"/>
+            <a:ext cx="12191695" cy="914400"/>
+          </a:xfrm>
+        </p:spPr>
+        <p:txBody>
+          <a:bodyPr/>
+          <a:lstStyle/>
+          <a:p>
+            <a:r>
+              <a:t>Three years later: the same silly idea becomes a playable game</a:t>
+            </a:r>
+          </a:p>
+        </p:txBody>
+      </p:sp>
       <p:grpSp>
         <p:nvGrpSpPr>
-          <p:cNvPr id="2" name="Group 1"/>
+          <p:cNvPr id="3" name="Window image.png">
+            <a:extLst>
+              <a:ext uri="{C183D7F6-B498-43B3-948B-1728B52AA6E4}">
+                <adec:decorative xmlns:adec="http://schemas.microsoft.com/office/drawing/2017/decorative" val="1"/>
+              </a:ext>
+            </a:extLst>
+          </p:cNvPr>
           <p:cNvGrpSpPr/>
           <p:nvPr/>
         </p:nvGrpSpPr>
@@ -4664,7 +4867,7 @@
         </p:grpSpPr>
         <p:sp>
           <p:nvSpPr>
-            <p:cNvPr id="3" name="Rectangle 2"/>
+            <p:cNvPr id="4" name="Rectangle 3"/>
             <p:cNvSpPr/>
             <p:nvPr/>
           </p:nvSpPr>
@@ -4708,7 +4911,7 @@
         </p:sp>
         <p:sp>
           <p:nvSpPr>
-            <p:cNvPr id="4" name="Rectangle 3"/>
+            <p:cNvPr id="5" name="Rectangle 4"/>
             <p:cNvSpPr/>
             <p:nvPr/>
           </p:nvSpPr>
@@ -4754,7 +4957,7 @@
         </p:sp>
         <p:sp>
           <p:nvSpPr>
-            <p:cNvPr id="5" name="Rectangle 4"/>
+            <p:cNvPr id="6" name="Rectangle 5"/>
             <p:cNvSpPr/>
             <p:nvPr/>
           </p:nvSpPr>
@@ -4800,7 +5003,7 @@
         </p:sp>
         <p:sp>
           <p:nvSpPr>
-            <p:cNvPr id="6" name="Rectangle 5"/>
+            <p:cNvPr id="7" name="Rectangle 6"/>
             <p:cNvSpPr/>
             <p:nvPr/>
           </p:nvSpPr>
@@ -4846,7 +5049,7 @@
         </p:sp>
         <p:sp>
           <p:nvSpPr>
-            <p:cNvPr id="7" name="Rectangle 6"/>
+            <p:cNvPr id="8" name="Rectangle 7"/>
             <p:cNvSpPr/>
             <p:nvPr/>
           </p:nvSpPr>
@@ -4892,7 +5095,7 @@
         </p:sp>
         <p:sp>
           <p:nvSpPr>
-            <p:cNvPr id="8" name="Rectangle 7"/>
+            <p:cNvPr id="9" name="Rectangle 8"/>
             <p:cNvSpPr/>
             <p:nvPr/>
           </p:nvSpPr>
@@ -4938,7 +5141,7 @@
         </p:sp>
         <p:sp>
           <p:nvSpPr>
-            <p:cNvPr id="9" name="TextBox 8"/>
+            <p:cNvPr id="10" name="TextBox 9"/>
             <p:cNvSpPr txBox="1"/>
             <p:nvPr/>
           </p:nvSpPr>
@@ -4973,7 +5176,7 @@
       </p:grpSp>
       <p:pic>
         <p:nvPicPr>
-          <p:cNvPr id="10" name="Picture 9" descr="Excerpt in which Gemini says it has built a fully interactive, playable Candy-Powered FTL Starship Simulator, above a screenshot of the dark game interface with a small rocket and fuel buttons."/>
+          <p:cNvPr id="11" name="Picture 10" descr="Excerpt in which Gemini says it has built a fully interactive, playable Candy-Powered FTL Starship Simulator, above a screenshot of the dark game interface with a small rocket and fuel buttons."/>
           <p:cNvPicPr>
             <a:picLocks noChangeAspect="1"/>
           </p:cNvPicPr>
@@ -4997,13 +5200,13 @@
       </p:pic>
       <p:sp>
         <p:nvSpPr>
-          <p:cNvPr id="11" name="TextBox 10"/>
+          <p:cNvPr id="12" name="TextBox 11"/>
           <p:cNvSpPr txBox="1"/>
           <p:nvPr/>
         </p:nvSpPr>
         <p:spPr>
           <a:xfrm>
-            <a:off x="822960" y="5989320"/>
+            <a:off x="822960" y="5943600"/>
             <a:ext cx="10545775" cy="731520"/>
           </a:xfrm>
           <a:prstGeom prst="rect">
@@ -5056,9 +5259,41 @@
         <p:nvPr/>
       </p:nvGrpSpPr>
       <p:grpSpPr/>
+      <p:sp>
+        <p:nvSpPr>
+          <p:cNvPr id="2" name="Title 1"/>
+          <p:cNvSpPr>
+            <a:spLocks noGrp="1"/>
+          </p:cNvSpPr>
+          <p:nvPr>
+            <p:ph type="title"/>
+          </p:nvPr>
+        </p:nvSpPr>
+        <p:spPr>
+          <a:xfrm>
+            <a:off x="-12191695" y="0"/>
+            <a:ext cx="12191695" cy="914400"/>
+          </a:xfrm>
+        </p:spPr>
+        <p:txBody>
+          <a:bodyPr/>
+          <a:lstStyle/>
+          <a:p>
+            <a:r>
+              <a:t>Simon Willison's pelican test, 2024: can a model draw with code?</a:t>
+            </a:r>
+          </a:p>
+        </p:txBody>
+      </p:sp>
       <p:grpSp>
         <p:nvGrpSpPr>
-          <p:cNvPr id="2" name="Group 1"/>
+          <p:cNvPr id="3" name="Window image.png">
+            <a:extLst>
+              <a:ext uri="{C183D7F6-B498-43B3-948B-1728B52AA6E4}">
+                <adec:decorative xmlns:adec="http://schemas.microsoft.com/office/drawing/2017/decorative" val="1"/>
+              </a:ext>
+            </a:extLst>
+          </p:cNvPr>
           <p:cNvGrpSpPr/>
           <p:nvPr/>
         </p:nvGrpSpPr>
@@ -5072,7 +5307,7 @@
         </p:grpSpPr>
         <p:sp>
           <p:nvSpPr>
-            <p:cNvPr id="3" name="Rectangle 2"/>
+            <p:cNvPr id="4" name="Rectangle 3"/>
             <p:cNvSpPr/>
             <p:nvPr/>
           </p:nvSpPr>
@@ -5116,7 +5351,7 @@
         </p:sp>
         <p:sp>
           <p:nvSpPr>
-            <p:cNvPr id="4" name="Rectangle 3"/>
+            <p:cNvPr id="5" name="Rectangle 4"/>
             <p:cNvSpPr/>
             <p:nvPr/>
           </p:nvSpPr>
@@ -5162,7 +5397,7 @@
         </p:sp>
         <p:sp>
           <p:nvSpPr>
-            <p:cNvPr id="5" name="Rectangle 4"/>
+            <p:cNvPr id="6" name="Rectangle 5"/>
             <p:cNvSpPr/>
             <p:nvPr/>
           </p:nvSpPr>
@@ -5208,7 +5443,7 @@
         </p:sp>
         <p:sp>
           <p:nvSpPr>
-            <p:cNvPr id="6" name="Rectangle 5"/>
+            <p:cNvPr id="7" name="Rectangle 6"/>
             <p:cNvSpPr/>
             <p:nvPr/>
           </p:nvSpPr>
@@ -5254,7 +5489,7 @@
         </p:sp>
         <p:sp>
           <p:nvSpPr>
-            <p:cNvPr id="7" name="Rectangle 6"/>
+            <p:cNvPr id="8" name="Rectangle 7"/>
             <p:cNvSpPr/>
             <p:nvPr/>
           </p:nvSpPr>
@@ -5300,7 +5535,7 @@
         </p:sp>
         <p:sp>
           <p:nvSpPr>
-            <p:cNvPr id="8" name="Rectangle 7"/>
+            <p:cNvPr id="9" name="Rectangle 8"/>
             <p:cNvSpPr/>
             <p:nvPr/>
           </p:nvSpPr>
@@ -5346,7 +5581,7 @@
         </p:sp>
         <p:sp>
           <p:nvSpPr>
-            <p:cNvPr id="9" name="TextBox 8"/>
+            <p:cNvPr id="10" name="TextBox 9"/>
             <p:cNvSpPr txBox="1"/>
             <p:nvPr/>
           </p:nvSpPr>
@@ -5381,7 +5616,7 @@
       </p:grpSp>
       <p:pic>
         <p:nvPicPr>
-          <p:cNvPr id="10" name="Picture 9" descr="Blog excerpt introducing the prompt 'Generate an SVG of a pelican riding a bicycle,' followed by two sparse black line drawings of crude bicycles with small bird shapes on top."/>
+          <p:cNvPr id="11" name="Picture 10" descr="Blog excerpt introducing the prompt 'Generate an SVG of a pelican riding a bicycle,' followed by two sparse black line drawings of crude bicycles with small bird shapes on top."/>
           <p:cNvPicPr>
             <a:picLocks noChangeAspect="1"/>
           </p:cNvPicPr>
@@ -5405,13 +5640,13 @@
       </p:pic>
       <p:sp>
         <p:nvSpPr>
-          <p:cNvPr id="11" name="TextBox 10"/>
+          <p:cNvPr id="12" name="TextBox 11"/>
           <p:cNvSpPr txBox="1"/>
           <p:nvPr/>
         </p:nvSpPr>
         <p:spPr>
           <a:xfrm>
-            <a:off x="822960" y="5989320"/>
+            <a:off x="822960" y="5943600"/>
             <a:ext cx="10545775" cy="731520"/>
           </a:xfrm>
           <a:prstGeom prst="rect">
@@ -5474,9 +5709,41 @@
         <p:nvPr/>
       </p:nvGrpSpPr>
       <p:grpSpPr/>
+      <p:sp>
+        <p:nvSpPr>
+          <p:cNvPr id="2" name="Title 1"/>
+          <p:cNvSpPr>
+            <a:spLocks noGrp="1"/>
+          </p:cNvSpPr>
+          <p:nvPr>
+            <p:ph type="title"/>
+          </p:nvPr>
+        </p:nvSpPr>
+        <p:spPr>
+          <a:xfrm>
+            <a:off x="-12191695" y="0"/>
+            <a:ext cx="12191695" cy="914400"/>
+          </a:xfrm>
+        </p:spPr>
+        <p:txBody>
+          <a:bodyPr/>
+          <a:lstStyle/>
+          <a:p>
+            <a:r>
+              <a:t>The same prompt in 2026</a:t>
+            </a:r>
+          </a:p>
+        </p:txBody>
+      </p:sp>
       <p:grpSp>
         <p:nvGrpSpPr>
-          <p:cNvPr id="2" name="Group 1"/>
+          <p:cNvPr id="3" name="Window image.png">
+            <a:extLst>
+              <a:ext uri="{C183D7F6-B498-43B3-948B-1728B52AA6E4}">
+                <adec:decorative xmlns:adec="http://schemas.microsoft.com/office/drawing/2017/decorative" val="1"/>
+              </a:ext>
+            </a:extLst>
+          </p:cNvPr>
           <p:cNvGrpSpPr/>
           <p:nvPr/>
         </p:nvGrpSpPr>
@@ -5490,7 +5757,7 @@
         </p:grpSpPr>
         <p:sp>
           <p:nvSpPr>
-            <p:cNvPr id="3" name="Rectangle 2"/>
+            <p:cNvPr id="4" name="Rectangle 3"/>
             <p:cNvSpPr/>
             <p:nvPr/>
           </p:nvSpPr>
@@ -5534,7 +5801,7 @@
         </p:sp>
         <p:sp>
           <p:nvSpPr>
-            <p:cNvPr id="4" name="Rectangle 3"/>
+            <p:cNvPr id="5" name="Rectangle 4"/>
             <p:cNvSpPr/>
             <p:nvPr/>
           </p:nvSpPr>
@@ -5580,7 +5847,7 @@
         </p:sp>
         <p:sp>
           <p:nvSpPr>
-            <p:cNvPr id="5" name="Rectangle 4"/>
+            <p:cNvPr id="6" name="Rectangle 5"/>
             <p:cNvSpPr/>
             <p:nvPr/>
           </p:nvSpPr>
@@ -5626,7 +5893,7 @@
         </p:sp>
         <p:sp>
           <p:nvSpPr>
-            <p:cNvPr id="6" name="Rectangle 5"/>
+            <p:cNvPr id="7" name="Rectangle 6"/>
             <p:cNvSpPr/>
             <p:nvPr/>
           </p:nvSpPr>
@@ -5672,7 +5939,7 @@
         </p:sp>
         <p:sp>
           <p:nvSpPr>
-            <p:cNvPr id="7" name="Rectangle 6"/>
+            <p:cNvPr id="8" name="Rectangle 7"/>
             <p:cNvSpPr/>
             <p:nvPr/>
           </p:nvSpPr>
@@ -5718,7 +5985,7 @@
         </p:sp>
         <p:sp>
           <p:nvSpPr>
-            <p:cNvPr id="8" name="Rectangle 7"/>
+            <p:cNvPr id="9" name="Rectangle 8"/>
             <p:cNvSpPr/>
             <p:nvPr/>
           </p:nvSpPr>
@@ -5764,7 +6031,7 @@
         </p:sp>
         <p:sp>
           <p:nvSpPr>
-            <p:cNvPr id="9" name="TextBox 8"/>
+            <p:cNvPr id="10" name="TextBox 9"/>
             <p:cNvSpPr txBox="1"/>
             <p:nvPr/>
           </p:nvSpPr>
@@ -5799,7 +6066,7 @@
       </p:grpSp>
       <p:pic>
         <p:nvPicPr>
-          <p:cNvPr id="10" name="Picture 9" descr="Clean vector illustration of a white pelican with a large orange bill pedaling a teal bicycle across a green hill under a yellow sun."/>
+          <p:cNvPr id="11" name="Picture 10" descr="Clean vector illustration of a white pelican with a large orange bill pedaling a teal bicycle across a green hill under a yellow sun."/>
           <p:cNvPicPr>
             <a:picLocks noChangeAspect="1"/>
           </p:cNvPicPr>
@@ -5823,13 +6090,13 @@
       </p:pic>
       <p:sp>
         <p:nvSpPr>
-          <p:cNvPr id="11" name="TextBox 10"/>
+          <p:cNvPr id="12" name="TextBox 11"/>
           <p:cNvSpPr txBox="1"/>
           <p:nvPr/>
         </p:nvSpPr>
         <p:spPr>
           <a:xfrm>
-            <a:off x="822960" y="5989320"/>
+            <a:off x="822960" y="5943600"/>
             <a:ext cx="10545775" cy="731520"/>
           </a:xfrm>
           <a:prstGeom prst="rect">
@@ -5894,14 +6161,40 @@
       <p:grpSpPr/>
       <p:sp>
         <p:nvSpPr>
-          <p:cNvPr id="2" name="TextBox 1"/>
+          <p:cNvPr id="2" name="Title 1"/>
+          <p:cNvSpPr>
+            <a:spLocks noGrp="1"/>
+          </p:cNvSpPr>
+          <p:nvPr>
+            <p:ph type="title"/>
+          </p:nvPr>
+        </p:nvSpPr>
+        <p:spPr>
+          <a:xfrm>
+            <a:off x="-12191695" y="0"/>
+            <a:ext cx="12191695" cy="914400"/>
+          </a:xfrm>
+        </p:spPr>
+        <p:txBody>
+          <a:bodyPr/>
+          <a:lstStyle/>
+          <a:p>
+            <a:r>
+              <a:t>Building by asking</a:t>
+            </a:r>
+          </a:p>
+        </p:txBody>
+      </p:sp>
+      <p:sp>
+        <p:nvSpPr>
+          <p:cNvPr id="3" name="TextBox 2"/>
           <p:cNvSpPr txBox="1"/>
           <p:nvPr/>
         </p:nvSpPr>
         <p:spPr>
           <a:xfrm>
-            <a:off x="731520" y="1463040"/>
-            <a:ext cx="10728655" cy="2926080"/>
+            <a:off x="274320" y="1417320"/>
+            <a:ext cx="11643055" cy="4023360"/>
           </a:xfrm>
           <a:prstGeom prst="rect">
             <a:avLst/>
@@ -5926,7 +6219,11 @@
             </a:r>
           </a:p>
           <a:p>
-            <a:pPr algn="ctr"/>
+            <a:pPr algn="ctr">
+              <a:spcBef>
+                <a:spcPts val="1000"/>
+              </a:spcBef>
+            </a:pPr>
             <a:r>
               <a:rPr sz="2800" b="0" i="0">
                 <a:solidFill>
@@ -5965,9 +6262,41 @@
         <p:nvPr/>
       </p:nvGrpSpPr>
       <p:grpSpPr/>
+      <p:sp>
+        <p:nvSpPr>
+          <p:cNvPr id="2" name="Title 1"/>
+          <p:cNvSpPr>
+            <a:spLocks noGrp="1"/>
+          </p:cNvSpPr>
+          <p:nvPr>
+            <p:ph type="title"/>
+          </p:nvPr>
+        </p:nvSpPr>
+        <p:spPr>
+          <a:xfrm>
+            <a:off x="-12191695" y="0"/>
+            <a:ext cx="12191695" cy="914400"/>
+          </a:xfrm>
+        </p:spPr>
+        <p:txBody>
+          <a:bodyPr/>
+          <a:lstStyle/>
+          <a:p>
+            <a:r>
+              <a:t>Chat on the left, a working web page on the right</a:t>
+            </a:r>
+          </a:p>
+        </p:txBody>
+      </p:sp>
       <p:grpSp>
         <p:nvGrpSpPr>
-          <p:cNvPr id="2" name="Group 1"/>
+          <p:cNvPr id="3" name="Window image.png">
+            <a:extLst>
+              <a:ext uri="{C183D7F6-B498-43B3-948B-1728B52AA6E4}">
+                <adec:decorative xmlns:adec="http://schemas.microsoft.com/office/drawing/2017/decorative" val="1"/>
+              </a:ext>
+            </a:extLst>
+          </p:cNvPr>
           <p:cNvGrpSpPr/>
           <p:nvPr/>
         </p:nvGrpSpPr>
@@ -5981,7 +6310,7 @@
         </p:grpSpPr>
         <p:sp>
           <p:nvSpPr>
-            <p:cNvPr id="3" name="Rectangle 2"/>
+            <p:cNvPr id="4" name="Rectangle 3"/>
             <p:cNvSpPr/>
             <p:nvPr/>
           </p:nvSpPr>
@@ -6025,7 +6354,7 @@
         </p:sp>
         <p:sp>
           <p:nvSpPr>
-            <p:cNvPr id="4" name="Rectangle 3"/>
+            <p:cNvPr id="5" name="Rectangle 4"/>
             <p:cNvSpPr/>
             <p:nvPr/>
           </p:nvSpPr>
@@ -6071,7 +6400,7 @@
         </p:sp>
         <p:sp>
           <p:nvSpPr>
-            <p:cNvPr id="5" name="Rectangle 4"/>
+            <p:cNvPr id="6" name="Rectangle 5"/>
             <p:cNvSpPr/>
             <p:nvPr/>
           </p:nvSpPr>
@@ -6117,7 +6446,7 @@
         </p:sp>
         <p:sp>
           <p:nvSpPr>
-            <p:cNvPr id="6" name="Rectangle 5"/>
+            <p:cNvPr id="7" name="Rectangle 6"/>
             <p:cNvSpPr/>
             <p:nvPr/>
           </p:nvSpPr>
@@ -6163,7 +6492,7 @@
         </p:sp>
         <p:sp>
           <p:nvSpPr>
-            <p:cNvPr id="7" name="Rectangle 6"/>
+            <p:cNvPr id="8" name="Rectangle 7"/>
             <p:cNvSpPr/>
             <p:nvPr/>
           </p:nvSpPr>
@@ -6209,7 +6538,7 @@
         </p:sp>
         <p:sp>
           <p:nvSpPr>
-            <p:cNvPr id="8" name="Rectangle 7"/>
+            <p:cNvPr id="9" name="Rectangle 8"/>
             <p:cNvSpPr/>
             <p:nvPr/>
           </p:nvSpPr>
@@ -6255,7 +6584,7 @@
         </p:sp>
         <p:sp>
           <p:nvSpPr>
-            <p:cNvPr id="9" name="TextBox 8"/>
+            <p:cNvPr id="10" name="TextBox 9"/>
             <p:cNvSpPr txBox="1"/>
             <p:nvPr/>
           </p:nvSpPr>
@@ -6290,7 +6619,7 @@
       </p:grpSp>
       <p:pic>
         <p:nvPicPr>
-          <p:cNvPr id="10" name="Picture 9" descr="Claude interface split in two: the chat on the left, where the user asks for a webpage with a Blake-inspired style, and a preview on the right of a page titled 'The Digital Innocent: A Song of Electronic Experience.'"/>
+          <p:cNvPr id="11" name="Picture 10" descr="Claude interface split in two: the chat on the left, where the user asks for a webpage with a Blake-inspired style, and a preview on the right of a page titled 'The Digital Innocent: A Song of Electronic Experience.'"/>
           <p:cNvPicPr>
             <a:picLocks noChangeAspect="1"/>
           </p:cNvPicPr>
@@ -6314,13 +6643,13 @@
       </p:pic>
       <p:sp>
         <p:nvSpPr>
-          <p:cNvPr id="11" name="TextBox 10"/>
+          <p:cNvPr id="12" name="TextBox 11"/>
           <p:cNvSpPr txBox="1"/>
           <p:nvPr/>
         </p:nvSpPr>
         <p:spPr>
           <a:xfrm>
-            <a:off x="822960" y="5989320"/>
+            <a:off x="822960" y="5943600"/>
             <a:ext cx="10545775" cy="731520"/>
           </a:xfrm>
           <a:prstGeom prst="rect">
@@ -6373,9 +6702,41 @@
         <p:nvPr/>
       </p:nvGrpSpPr>
       <p:grpSpPr/>
+      <p:sp>
+        <p:nvSpPr>
+          <p:cNvPr id="2" name="Title 1"/>
+          <p:cNvSpPr>
+            <a:spLocks noGrp="1"/>
+          </p:cNvSpPr>
+          <p:nvPr>
+            <p:ph type="title"/>
+          </p:nvPr>
+        </p:nvSpPr>
+        <p:spPr>
+          <a:xfrm>
+            <a:off x="-12191695" y="0"/>
+            <a:ext cx="12191695" cy="914400"/>
+          </a:xfrm>
+        </p:spPr>
+        <p:txBody>
+          <a:bodyPr/>
+          <a:lstStyle/>
+          <a:p>
+            <a:r>
+              <a:t>Revising by asking: a follow-up prompt that adds a feature</a:t>
+            </a:r>
+          </a:p>
+        </p:txBody>
+      </p:sp>
       <p:grpSp>
         <p:nvGrpSpPr>
-          <p:cNvPr id="2" name="Group 1"/>
+          <p:cNvPr id="3" name="Window image.png">
+            <a:extLst>
+              <a:ext uri="{C183D7F6-B498-43B3-948B-1728B52AA6E4}">
+                <adec:decorative xmlns:adec="http://schemas.microsoft.com/office/drawing/2017/decorative" val="1"/>
+              </a:ext>
+            </a:extLst>
+          </p:cNvPr>
           <p:cNvGrpSpPr/>
           <p:nvPr/>
         </p:nvGrpSpPr>
@@ -6389,7 +6750,7 @@
         </p:grpSpPr>
         <p:sp>
           <p:nvSpPr>
-            <p:cNvPr id="3" name="Rectangle 2"/>
+            <p:cNvPr id="4" name="Rectangle 3"/>
             <p:cNvSpPr/>
             <p:nvPr/>
           </p:nvSpPr>
@@ -6433,7 +6794,7 @@
         </p:sp>
         <p:sp>
           <p:nvSpPr>
-            <p:cNvPr id="4" name="Rectangle 3"/>
+            <p:cNvPr id="5" name="Rectangle 4"/>
             <p:cNvSpPr/>
             <p:nvPr/>
           </p:nvSpPr>
@@ -6479,7 +6840,7 @@
         </p:sp>
         <p:sp>
           <p:nvSpPr>
-            <p:cNvPr id="5" name="Rectangle 4"/>
+            <p:cNvPr id="6" name="Rectangle 5"/>
             <p:cNvSpPr/>
             <p:nvPr/>
           </p:nvSpPr>
@@ -6525,7 +6886,7 @@
         </p:sp>
         <p:sp>
           <p:nvSpPr>
-            <p:cNvPr id="6" name="Rectangle 5"/>
+            <p:cNvPr id="7" name="Rectangle 6"/>
             <p:cNvSpPr/>
             <p:nvPr/>
           </p:nvSpPr>
@@ -6571,7 +6932,7 @@
         </p:sp>
         <p:sp>
           <p:nvSpPr>
-            <p:cNvPr id="7" name="Rectangle 6"/>
+            <p:cNvPr id="8" name="Rectangle 7"/>
             <p:cNvSpPr/>
             <p:nvPr/>
           </p:nvSpPr>
@@ -6617,7 +6978,7 @@
         </p:sp>
         <p:sp>
           <p:nvSpPr>
-            <p:cNvPr id="8" name="Rectangle 7"/>
+            <p:cNvPr id="9" name="Rectangle 8"/>
             <p:cNvSpPr/>
             <p:nvPr/>
           </p:nvSpPr>
@@ -6663,7 +7024,7 @@
         </p:sp>
         <p:sp>
           <p:nvSpPr>
-            <p:cNvPr id="9" name="TextBox 8"/>
+            <p:cNvPr id="10" name="TextBox 9"/>
             <p:cNvSpPr txBox="1"/>
             <p:nvPr/>
           </p:nvSpPr>
@@ -6698,7 +7059,7 @@
       </p:grpSp>
       <p:pic>
         <p:nvPicPr>
-          <p:cNvPr id="10" name="Picture 9" descr="Claude chat in which the model explains keeping the meter and structure of Blake's 'The Lamb,' and the user's next prompt asks for a companion poem and an interactive artifact that switches between both poems."/>
+          <p:cNvPr id="11" name="Picture 10" descr="Claude chat in which the model explains keeping the meter and structure of Blake's 'The Lamb,' and the user's next prompt asks for a companion poem and an interactive artifact that switches between both poems."/>
           <p:cNvPicPr>
             <a:picLocks noChangeAspect="1"/>
           </p:cNvPicPr>
@@ -6722,13 +7083,13 @@
       </p:pic>
       <p:sp>
         <p:nvSpPr>
-          <p:cNvPr id="11" name="TextBox 10"/>
+          <p:cNvPr id="12" name="TextBox 11"/>
           <p:cNvSpPr txBox="1"/>
           <p:nvPr/>
         </p:nvSpPr>
         <p:spPr>
           <a:xfrm>
-            <a:off x="822960" y="5989320"/>
+            <a:off x="822960" y="5943600"/>
             <a:ext cx="10545775" cy="731520"/>
           </a:xfrm>
           <a:prstGeom prst="rect">
@@ -6781,9 +7142,41 @@
         <p:nvPr/>
       </p:nvGrpSpPr>
       <p:grpSpPr/>
+      <p:sp>
+        <p:nvSpPr>
+          <p:cNvPr id="2" name="Title 1"/>
+          <p:cNvSpPr>
+            <a:spLocks noGrp="1"/>
+          </p:cNvSpPr>
+          <p:nvPr>
+            <p:ph type="title"/>
+          </p:nvPr>
+        </p:nvSpPr>
+        <p:spPr>
+          <a:xfrm>
+            <a:off x="-12191695" y="0"/>
+            <a:ext cx="12191695" cy="914400"/>
+          </a:xfrm>
+        </p:spPr>
+        <p:txBody>
+          <a:bodyPr/>
+          <a:lstStyle/>
+          <a:p>
+            <a:r>
+              <a:t>The finished, published artifact</a:t>
+            </a:r>
+          </a:p>
+        </p:txBody>
+      </p:sp>
       <p:grpSp>
         <p:nvGrpSpPr>
-          <p:cNvPr id="2" name="Group 1"/>
+          <p:cNvPr id="3" name="Window image.png">
+            <a:extLst>
+              <a:ext uri="{C183D7F6-B498-43B3-948B-1728B52AA6E4}">
+                <adec:decorative xmlns:adec="http://schemas.microsoft.com/office/drawing/2017/decorative" val="1"/>
+              </a:ext>
+            </a:extLst>
+          </p:cNvPr>
           <p:cNvGrpSpPr/>
           <p:nvPr/>
         </p:nvGrpSpPr>
@@ -6797,7 +7190,7 @@
         </p:grpSpPr>
         <p:sp>
           <p:nvSpPr>
-            <p:cNvPr id="3" name="Rectangle 2"/>
+            <p:cNvPr id="4" name="Rectangle 3"/>
             <p:cNvSpPr/>
             <p:nvPr/>
           </p:nvSpPr>
@@ -6841,7 +7234,7 @@
         </p:sp>
         <p:sp>
           <p:nvSpPr>
-            <p:cNvPr id="4" name="Rectangle 3"/>
+            <p:cNvPr id="5" name="Rectangle 4"/>
             <p:cNvSpPr/>
             <p:nvPr/>
           </p:nvSpPr>
@@ -6887,7 +7280,7 @@
         </p:sp>
         <p:sp>
           <p:nvSpPr>
-            <p:cNvPr id="5" name="Rectangle 4"/>
+            <p:cNvPr id="6" name="Rectangle 5"/>
             <p:cNvSpPr/>
             <p:nvPr/>
           </p:nvSpPr>
@@ -6933,7 +7326,7 @@
         </p:sp>
         <p:sp>
           <p:nvSpPr>
-            <p:cNvPr id="6" name="Rectangle 5"/>
+            <p:cNvPr id="7" name="Rectangle 6"/>
             <p:cNvSpPr/>
             <p:nvPr/>
           </p:nvSpPr>
@@ -6979,7 +7372,7 @@
         </p:sp>
         <p:sp>
           <p:nvSpPr>
-            <p:cNvPr id="7" name="Rectangle 6"/>
+            <p:cNvPr id="8" name="Rectangle 7"/>
             <p:cNvSpPr/>
             <p:nvPr/>
           </p:nvSpPr>
@@ -7025,7 +7418,7 @@
         </p:sp>
         <p:sp>
           <p:nvSpPr>
-            <p:cNvPr id="8" name="Rectangle 7"/>
+            <p:cNvPr id="9" name="Rectangle 8"/>
             <p:cNvSpPr/>
             <p:nvPr/>
           </p:nvSpPr>
@@ -7071,7 +7464,7 @@
         </p:sp>
         <p:sp>
           <p:nvSpPr>
-            <p:cNvPr id="9" name="TextBox 8"/>
+            <p:cNvPr id="10" name="TextBox 9"/>
             <p:cNvSpPr txBox="1"/>
             <p:nvPr/>
           </p:nvSpPr>
@@ -7106,7 +7499,7 @@
       </p:grpSp>
       <p:pic>
         <p:nvPicPr>
-          <p:cNvPr id="10" name="Picture 9" descr="Published Claude artifact 'Songs of a New Machine': a cream-colored, Blake-style plate titled 'The Word' with the poem 'Little word, who fashioned thee?' framed by flowering vines."/>
+          <p:cNvPr id="11" name="Picture 10" descr="Published Claude artifact 'Songs of a New Machine': a cream-colored, Blake-style plate titled 'The Word' with the poem 'Little word, who fashioned thee?' framed by flowering vines."/>
           <p:cNvPicPr>
             <a:picLocks noChangeAspect="1"/>
           </p:cNvPicPr>
@@ -7130,13 +7523,13 @@
       </p:pic>
       <p:sp>
         <p:nvSpPr>
-          <p:cNvPr id="11" name="TextBox 10"/>
+          <p:cNvPr id="12" name="TextBox 11"/>
           <p:cNvSpPr txBox="1"/>
           <p:nvPr/>
         </p:nvSpPr>
         <p:spPr>
           <a:xfrm>
-            <a:off x="822960" y="5989320"/>
+            <a:off x="822960" y="5943600"/>
             <a:ext cx="10545775" cy="731520"/>
           </a:xfrm>
           <a:prstGeom prst="rect">
@@ -7199,9 +7592,41 @@
         <p:nvPr/>
       </p:nvGrpSpPr>
       <p:grpSpPr/>
+      <p:sp>
+        <p:nvSpPr>
+          <p:cNvPr id="2" name="Title 1"/>
+          <p:cNvSpPr>
+            <a:spLocks noGrp="1"/>
+          </p:cNvSpPr>
+          <p:nvPr>
+            <p:ph type="title"/>
+          </p:nvPr>
+        </p:nvSpPr>
+        <p:spPr>
+          <a:xfrm>
+            <a:off x="-12191695" y="0"/>
+            <a:ext cx="12191695" cy="914400"/>
+          </a:xfrm>
+        </p:spPr>
+        <p:txBody>
+          <a:bodyPr/>
+          <a:lstStyle/>
+          <a:p>
+            <a:r>
+              <a:t>A public-domain 1919 song, turned into an animated web page</a:t>
+            </a:r>
+          </a:p>
+        </p:txBody>
+      </p:sp>
       <p:grpSp>
         <p:nvGrpSpPr>
-          <p:cNvPr id="2" name="Group 1"/>
+          <p:cNvPr id="3" name="Window image.png">
+            <a:extLst>
+              <a:ext uri="{C183D7F6-B498-43B3-948B-1728B52AA6E4}">
+                <adec:decorative xmlns:adec="http://schemas.microsoft.com/office/drawing/2017/decorative" val="1"/>
+              </a:ext>
+            </a:extLst>
+          </p:cNvPr>
           <p:cNvGrpSpPr/>
           <p:nvPr/>
         </p:nvGrpSpPr>
@@ -7215,7 +7640,7 @@
         </p:grpSpPr>
         <p:sp>
           <p:nvSpPr>
-            <p:cNvPr id="3" name="Rectangle 2"/>
+            <p:cNvPr id="4" name="Rectangle 3"/>
             <p:cNvSpPr/>
             <p:nvPr/>
           </p:nvSpPr>
@@ -7259,7 +7684,7 @@
         </p:sp>
         <p:sp>
           <p:nvSpPr>
-            <p:cNvPr id="4" name="Rectangle 3"/>
+            <p:cNvPr id="5" name="Rectangle 4"/>
             <p:cNvSpPr/>
             <p:nvPr/>
           </p:nvSpPr>
@@ -7305,7 +7730,7 @@
         </p:sp>
         <p:sp>
           <p:nvSpPr>
-            <p:cNvPr id="5" name="Rectangle 4"/>
+            <p:cNvPr id="6" name="Rectangle 5"/>
             <p:cNvSpPr/>
             <p:nvPr/>
           </p:nvSpPr>
@@ -7351,7 +7776,7 @@
         </p:sp>
         <p:sp>
           <p:nvSpPr>
-            <p:cNvPr id="6" name="Rectangle 5"/>
+            <p:cNvPr id="7" name="Rectangle 6"/>
             <p:cNvSpPr/>
             <p:nvPr/>
           </p:nvSpPr>
@@ -7397,7 +7822,7 @@
         </p:sp>
         <p:sp>
           <p:nvSpPr>
-            <p:cNvPr id="7" name="Rectangle 6"/>
+            <p:cNvPr id="8" name="Rectangle 7"/>
             <p:cNvSpPr/>
             <p:nvPr/>
           </p:nvSpPr>
@@ -7443,7 +7868,7 @@
         </p:sp>
         <p:sp>
           <p:nvSpPr>
-            <p:cNvPr id="8" name="Rectangle 7"/>
+            <p:cNvPr id="9" name="Rectangle 8"/>
             <p:cNvSpPr/>
             <p:nvPr/>
           </p:nvSpPr>
@@ -7489,7 +7914,7 @@
         </p:sp>
         <p:sp>
           <p:nvSpPr>
-            <p:cNvPr id="9" name="TextBox 8"/>
+            <p:cNvPr id="10" name="TextBox 9"/>
             <p:cNvSpPr txBox="1"/>
             <p:nvPr/>
           </p:nvSpPr>
@@ -7524,7 +7949,7 @@
       </p:grpSp>
       <p:pic>
         <p:nvPicPr>
-          <p:cNvPr id="10" name="Picture 9" descr="Title card of a web animation, 'Take Me to the Land of Jazz! A Brushstroke Jamboree,' in a vaudeville style with red and gold sunburst stripes and a 'Play the picture' button."/>
+          <p:cNvPr id="11" name="Picture 10" descr="Title card of a web animation, 'Take Me to the Land of Jazz! A Brushstroke Jamboree,' in a vaudeville style with red and gold sunburst stripes and a 'Play the picture' button."/>
           <p:cNvPicPr>
             <a:picLocks noChangeAspect="1"/>
           </p:cNvPicPr>
@@ -7548,13 +7973,13 @@
       </p:pic>
       <p:sp>
         <p:nvSpPr>
-          <p:cNvPr id="11" name="TextBox 10"/>
+          <p:cNvPr id="12" name="TextBox 11"/>
           <p:cNvSpPr txBox="1"/>
           <p:nvPr/>
         </p:nvSpPr>
         <p:spPr>
           <a:xfrm>
-            <a:off x="822960" y="5989320"/>
+            <a:off x="822960" y="5943600"/>
             <a:ext cx="10545775" cy="731520"/>
           </a:xfrm>
           <a:prstGeom prst="rect">
@@ -7619,14 +8044,40 @@
       <p:grpSpPr/>
       <p:sp>
         <p:nvSpPr>
-          <p:cNvPr id="2" name="TextBox 1"/>
+          <p:cNvPr id="2" name="Title 1"/>
+          <p:cNvSpPr>
+            <a:spLocks noGrp="1"/>
+          </p:cNvSpPr>
+          <p:nvPr>
+            <p:ph type="title"/>
+          </p:nvPr>
+        </p:nvSpPr>
+        <p:spPr>
+          <a:xfrm>
+            <a:off x="-12191695" y="0"/>
+            <a:ext cx="12191695" cy="914400"/>
+          </a:xfrm>
+        </p:spPr>
+        <p:txBody>
+          <a:bodyPr/>
+          <a:lstStyle/>
+          <a:p>
+            <a:r>
+              <a:t>Working like Willison</a:t>
+            </a:r>
+          </a:p>
+        </p:txBody>
+      </p:sp>
+      <p:sp>
+        <p:nvSpPr>
+          <p:cNvPr id="3" name="TextBox 2"/>
           <p:cNvSpPr txBox="1"/>
           <p:nvPr/>
         </p:nvSpPr>
         <p:spPr>
           <a:xfrm>
-            <a:off x="731520" y="1463040"/>
-            <a:ext cx="10728655" cy="2926080"/>
+            <a:off x="274320" y="1417320"/>
+            <a:ext cx="11643055" cy="4023360"/>
           </a:xfrm>
           <a:prstGeom prst="rect">
             <a:avLst/>
@@ -7680,7 +8131,33 @@
       <p:grpSpPr/>
       <p:sp>
         <p:nvSpPr>
-          <p:cNvPr id="2" name="TextBox 1"/>
+          <p:cNvPr id="2" name="Title 1"/>
+          <p:cNvSpPr>
+            <a:spLocks noGrp="1"/>
+          </p:cNvSpPr>
+          <p:nvPr>
+            <p:ph type="title"/>
+          </p:nvPr>
+        </p:nvSpPr>
+        <p:spPr>
+          <a:xfrm>
+            <a:off x="-12191695" y="0"/>
+            <a:ext cx="12191695" cy="914400"/>
+          </a:xfrm>
+        </p:spPr>
+        <p:txBody>
+          <a:bodyPr/>
+          <a:lstStyle/>
+          <a:p>
+            <a:r>
+              <a:t>Readings</a:t>
+            </a:r>
+          </a:p>
+        </p:txBody>
+      </p:sp>
+      <p:sp>
+        <p:nvSpPr>
+          <p:cNvPr id="3" name="TextBox 2"/>
           <p:cNvSpPr txBox="1"/>
           <p:nvPr/>
         </p:nvSpPr>
@@ -7714,7 +8191,7 @@
       </p:sp>
       <p:sp>
         <p:nvSpPr>
-          <p:cNvPr id="3" name="TextBox 2"/>
+          <p:cNvPr id="4" name="TextBox 3"/>
           <p:cNvSpPr txBox="1"/>
           <p:nvPr/>
         </p:nvSpPr>
@@ -7775,7 +8252,7 @@
                 </a:solidFill>
                 <a:latin typeface="Verdana"/>
               </a:rPr>
-              <a:t>— why making things is a way of thinking</a:t>
+              <a:t> — why making things is a way of thinking</a:t>
             </a:r>
           </a:p>
           <a:p>
@@ -7820,7 +8297,7 @@
                 </a:solidFill>
                 <a:latin typeface="Verdana"/>
               </a:rPr>
-              <a:t>— practical habits from a programmer who uses AI every day</a:t>
+              <a:t> — practical habits from a programmer who uses AI every day</a:t>
             </a:r>
           </a:p>
         </p:txBody>
@@ -7851,9 +8328,41 @@
         <p:nvPr/>
       </p:nvGrpSpPr>
       <p:grpSpPr/>
+      <p:sp>
+        <p:nvSpPr>
+          <p:cNvPr id="2" name="Title 1"/>
+          <p:cNvSpPr>
+            <a:spLocks noGrp="1"/>
+          </p:cNvSpPr>
+          <p:nvPr>
+            <p:ph type="title"/>
+          </p:nvPr>
+        </p:nvSpPr>
+        <p:spPr>
+          <a:xfrm>
+            <a:off x="-12191695" y="0"/>
+            <a:ext cx="12191695" cy="914400"/>
+          </a:xfrm>
+        </p:spPr>
+        <p:txBody>
+          <a:bodyPr/>
+          <a:lstStyle/>
+          <a:p>
+            <a:r>
+              <a:t>Quote: Simon Willison, 2025</a:t>
+            </a:r>
+          </a:p>
+        </p:txBody>
+      </p:sp>
       <p:grpSp>
         <p:nvGrpSpPr>
-          <p:cNvPr id="2" name="Group 1"/>
+          <p:cNvPr id="3" name="Window quote.txt">
+            <a:extLst>
+              <a:ext uri="{C183D7F6-B498-43B3-948B-1728B52AA6E4}">
+                <adec:decorative xmlns:adec="http://schemas.microsoft.com/office/drawing/2017/decorative" val="1"/>
+              </a:ext>
+            </a:extLst>
+          </p:cNvPr>
           <p:cNvGrpSpPr/>
           <p:nvPr/>
         </p:nvGrpSpPr>
@@ -7867,7 +8376,7 @@
         </p:grpSpPr>
         <p:sp>
           <p:nvSpPr>
-            <p:cNvPr id="3" name="Rectangle 2"/>
+            <p:cNvPr id="4" name="Rectangle 3"/>
             <p:cNvSpPr/>
             <p:nvPr/>
           </p:nvSpPr>
@@ -7911,7 +8420,7 @@
         </p:sp>
         <p:sp>
           <p:nvSpPr>
-            <p:cNvPr id="4" name="Rectangle 3"/>
+            <p:cNvPr id="5" name="Rectangle 4"/>
             <p:cNvSpPr/>
             <p:nvPr/>
           </p:nvSpPr>
@@ -7957,7 +8466,7 @@
         </p:sp>
         <p:sp>
           <p:nvSpPr>
-            <p:cNvPr id="5" name="Rectangle 4"/>
+            <p:cNvPr id="6" name="Rectangle 5"/>
             <p:cNvSpPr/>
             <p:nvPr/>
           </p:nvSpPr>
@@ -8003,7 +8512,7 @@
         </p:sp>
         <p:sp>
           <p:nvSpPr>
-            <p:cNvPr id="6" name="Rectangle 5"/>
+            <p:cNvPr id="7" name="Rectangle 6"/>
             <p:cNvSpPr/>
             <p:nvPr/>
           </p:nvSpPr>
@@ -8049,7 +8558,7 @@
         </p:sp>
         <p:sp>
           <p:nvSpPr>
-            <p:cNvPr id="7" name="Rectangle 6"/>
+            <p:cNvPr id="8" name="Rectangle 7"/>
             <p:cNvSpPr/>
             <p:nvPr/>
           </p:nvSpPr>
@@ -8095,7 +8604,7 @@
         </p:sp>
         <p:sp>
           <p:nvSpPr>
-            <p:cNvPr id="8" name="Rectangle 7"/>
+            <p:cNvPr id="9" name="Rectangle 8"/>
             <p:cNvSpPr/>
             <p:nvPr/>
           </p:nvSpPr>
@@ -8141,7 +8650,7 @@
         </p:sp>
         <p:sp>
           <p:nvSpPr>
-            <p:cNvPr id="9" name="TextBox 8"/>
+            <p:cNvPr id="10" name="TextBox 9"/>
             <p:cNvSpPr txBox="1"/>
             <p:nvPr/>
           </p:nvSpPr>
@@ -8176,7 +8685,7 @@
       </p:grpSp>
       <p:sp>
         <p:nvSpPr>
-          <p:cNvPr id="10" name="TextBox 9"/>
+          <p:cNvPr id="11" name="TextBox 10"/>
           <p:cNvSpPr txBox="1"/>
           <p:nvPr/>
         </p:nvSpPr>
@@ -8210,7 +8719,7 @@
       </p:sp>
       <p:sp>
         <p:nvSpPr>
-          <p:cNvPr id="11" name="TextBox 10"/>
+          <p:cNvPr id="12" name="TextBox 11"/>
           <p:cNvSpPr txBox="1"/>
           <p:nvPr/>
         </p:nvSpPr>
@@ -8279,9 +8788,41 @@
         <p:nvPr/>
       </p:nvGrpSpPr>
       <p:grpSpPr/>
+      <p:sp>
+        <p:nvSpPr>
+          <p:cNvPr id="2" name="Title 1"/>
+          <p:cNvSpPr>
+            <a:spLocks noGrp="1"/>
+          </p:cNvSpPr>
+          <p:nvPr>
+            <p:ph type="title"/>
+          </p:nvPr>
+        </p:nvSpPr>
+        <p:spPr>
+          <a:xfrm>
+            <a:off x="-12191695" y="0"/>
+            <a:ext cx="12191695" cy="914400"/>
+          </a:xfrm>
+        </p:spPr>
+        <p:txBody>
+          <a:bodyPr/>
+          <a:lstStyle/>
+          <a:p>
+            <a:r>
+              <a:t>Quote: Simon Willison, 2025</a:t>
+            </a:r>
+          </a:p>
+        </p:txBody>
+      </p:sp>
       <p:grpSp>
         <p:nvGrpSpPr>
-          <p:cNvPr id="2" name="Group 1"/>
+          <p:cNvPr id="3" name="Window quote.txt">
+            <a:extLst>
+              <a:ext uri="{C183D7F6-B498-43B3-948B-1728B52AA6E4}">
+                <adec:decorative xmlns:adec="http://schemas.microsoft.com/office/drawing/2017/decorative" val="1"/>
+              </a:ext>
+            </a:extLst>
+          </p:cNvPr>
           <p:cNvGrpSpPr/>
           <p:nvPr/>
         </p:nvGrpSpPr>
@@ -8295,7 +8836,7 @@
         </p:grpSpPr>
         <p:sp>
           <p:nvSpPr>
-            <p:cNvPr id="3" name="Rectangle 2"/>
+            <p:cNvPr id="4" name="Rectangle 3"/>
             <p:cNvSpPr/>
             <p:nvPr/>
           </p:nvSpPr>
@@ -8339,7 +8880,7 @@
         </p:sp>
         <p:sp>
           <p:nvSpPr>
-            <p:cNvPr id="4" name="Rectangle 3"/>
+            <p:cNvPr id="5" name="Rectangle 4"/>
             <p:cNvSpPr/>
             <p:nvPr/>
           </p:nvSpPr>
@@ -8385,7 +8926,7 @@
         </p:sp>
         <p:sp>
           <p:nvSpPr>
-            <p:cNvPr id="5" name="Rectangle 4"/>
+            <p:cNvPr id="6" name="Rectangle 5"/>
             <p:cNvSpPr/>
             <p:nvPr/>
           </p:nvSpPr>
@@ -8431,7 +8972,7 @@
         </p:sp>
         <p:sp>
           <p:nvSpPr>
-            <p:cNvPr id="6" name="Rectangle 5"/>
+            <p:cNvPr id="7" name="Rectangle 6"/>
             <p:cNvSpPr/>
             <p:nvPr/>
           </p:nvSpPr>
@@ -8477,7 +9018,7 @@
         </p:sp>
         <p:sp>
           <p:nvSpPr>
-            <p:cNvPr id="7" name="Rectangle 6"/>
+            <p:cNvPr id="8" name="Rectangle 7"/>
             <p:cNvSpPr/>
             <p:nvPr/>
           </p:nvSpPr>
@@ -8523,7 +9064,7 @@
         </p:sp>
         <p:sp>
           <p:nvSpPr>
-            <p:cNvPr id="8" name="Rectangle 7"/>
+            <p:cNvPr id="9" name="Rectangle 8"/>
             <p:cNvSpPr/>
             <p:nvPr/>
           </p:nvSpPr>
@@ -8569,7 +9110,7 @@
         </p:sp>
         <p:sp>
           <p:nvSpPr>
-            <p:cNvPr id="9" name="TextBox 8"/>
+            <p:cNvPr id="10" name="TextBox 9"/>
             <p:cNvSpPr txBox="1"/>
             <p:nvPr/>
           </p:nvSpPr>
@@ -8604,7 +9145,7 @@
       </p:grpSp>
       <p:sp>
         <p:nvSpPr>
-          <p:cNvPr id="10" name="TextBox 9"/>
+          <p:cNvPr id="11" name="TextBox 10"/>
           <p:cNvSpPr txBox="1"/>
           <p:nvPr/>
         </p:nvSpPr>
@@ -8625,7 +9166,7 @@
           <a:lstStyle/>
           <a:p>
             <a:r>
-              <a:rPr sz="2200" b="0" i="0">
+              <a:rPr sz="2800" b="0" i="0">
                 <a:solidFill>
                   <a:srgbClr val="1B1035"/>
                 </a:solidFill>
@@ -8638,7 +9179,7 @@
       </p:sp>
       <p:sp>
         <p:nvSpPr>
-          <p:cNvPr id="11" name="TextBox 10"/>
+          <p:cNvPr id="12" name="TextBox 11"/>
           <p:cNvSpPr txBox="1"/>
           <p:nvPr/>
         </p:nvSpPr>
@@ -8707,9 +9248,41 @@
         <p:nvPr/>
       </p:nvGrpSpPr>
       <p:grpSpPr/>
+      <p:sp>
+        <p:nvSpPr>
+          <p:cNvPr id="2" name="Title 1"/>
+          <p:cNvSpPr>
+            <a:spLocks noGrp="1"/>
+          </p:cNvSpPr>
+          <p:nvPr>
+            <p:ph type="title"/>
+          </p:nvPr>
+        </p:nvSpPr>
+        <p:spPr>
+          <a:xfrm>
+            <a:off x="-12191695" y="0"/>
+            <a:ext cx="12191695" cy="914400"/>
+          </a:xfrm>
+        </p:spPr>
+        <p:txBody>
+          <a:bodyPr/>
+          <a:lstStyle/>
+          <a:p>
+            <a:r>
+              <a:t>Quote: Simon Willison, 2025</a:t>
+            </a:r>
+          </a:p>
+        </p:txBody>
+      </p:sp>
       <p:grpSp>
         <p:nvGrpSpPr>
-          <p:cNvPr id="2" name="Group 1"/>
+          <p:cNvPr id="3" name="Window quote.txt">
+            <a:extLst>
+              <a:ext uri="{C183D7F6-B498-43B3-948B-1728B52AA6E4}">
+                <adec:decorative xmlns:adec="http://schemas.microsoft.com/office/drawing/2017/decorative" val="1"/>
+              </a:ext>
+            </a:extLst>
+          </p:cNvPr>
           <p:cNvGrpSpPr/>
           <p:nvPr/>
         </p:nvGrpSpPr>
@@ -8723,7 +9296,7 @@
         </p:grpSpPr>
         <p:sp>
           <p:nvSpPr>
-            <p:cNvPr id="3" name="Rectangle 2"/>
+            <p:cNvPr id="4" name="Rectangle 3"/>
             <p:cNvSpPr/>
             <p:nvPr/>
           </p:nvSpPr>
@@ -8767,7 +9340,7 @@
         </p:sp>
         <p:sp>
           <p:nvSpPr>
-            <p:cNvPr id="4" name="Rectangle 3"/>
+            <p:cNvPr id="5" name="Rectangle 4"/>
             <p:cNvSpPr/>
             <p:nvPr/>
           </p:nvSpPr>
@@ -8813,7 +9386,7 @@
         </p:sp>
         <p:sp>
           <p:nvSpPr>
-            <p:cNvPr id="5" name="Rectangle 4"/>
+            <p:cNvPr id="6" name="Rectangle 5"/>
             <p:cNvSpPr/>
             <p:nvPr/>
           </p:nvSpPr>
@@ -8859,7 +9432,7 @@
         </p:sp>
         <p:sp>
           <p:nvSpPr>
-            <p:cNvPr id="6" name="Rectangle 5"/>
+            <p:cNvPr id="7" name="Rectangle 6"/>
             <p:cNvSpPr/>
             <p:nvPr/>
           </p:nvSpPr>
@@ -8905,7 +9478,7 @@
         </p:sp>
         <p:sp>
           <p:nvSpPr>
-            <p:cNvPr id="7" name="Rectangle 6"/>
+            <p:cNvPr id="8" name="Rectangle 7"/>
             <p:cNvSpPr/>
             <p:nvPr/>
           </p:nvSpPr>
@@ -8951,7 +9524,7 @@
         </p:sp>
         <p:sp>
           <p:nvSpPr>
-            <p:cNvPr id="8" name="Rectangle 7"/>
+            <p:cNvPr id="9" name="Rectangle 8"/>
             <p:cNvSpPr/>
             <p:nvPr/>
           </p:nvSpPr>
@@ -8997,7 +9570,7 @@
         </p:sp>
         <p:sp>
           <p:nvSpPr>
-            <p:cNvPr id="9" name="TextBox 8"/>
+            <p:cNvPr id="10" name="TextBox 9"/>
             <p:cNvSpPr txBox="1"/>
             <p:nvPr/>
           </p:nvSpPr>
@@ -9032,7 +9605,7 @@
       </p:grpSp>
       <p:sp>
         <p:nvSpPr>
-          <p:cNvPr id="10" name="TextBox 9"/>
+          <p:cNvPr id="11" name="TextBox 10"/>
           <p:cNvSpPr txBox="1"/>
           <p:nvPr/>
         </p:nvSpPr>
@@ -9066,7 +9639,7 @@
       </p:sp>
       <p:sp>
         <p:nvSpPr>
-          <p:cNvPr id="11" name="TextBox 10"/>
+          <p:cNvPr id="12" name="TextBox 11"/>
           <p:cNvSpPr txBox="1"/>
           <p:nvPr/>
         </p:nvSpPr>
@@ -9135,9 +9708,41 @@
         <p:nvPr/>
       </p:nvGrpSpPr>
       <p:grpSpPr/>
+      <p:sp>
+        <p:nvSpPr>
+          <p:cNvPr id="2" name="Title 1"/>
+          <p:cNvSpPr>
+            <a:spLocks noGrp="1"/>
+          </p:cNvSpPr>
+          <p:nvPr>
+            <p:ph type="title"/>
+          </p:nvPr>
+        </p:nvSpPr>
+        <p:spPr>
+          <a:xfrm>
+            <a:off x="-12191695" y="0"/>
+            <a:ext cx="12191695" cy="914400"/>
+          </a:xfrm>
+        </p:spPr>
+        <p:txBody>
+          <a:bodyPr/>
+          <a:lstStyle/>
+          <a:p>
+            <a:r>
+              <a:t>Quote: Simon Willison, 2025</a:t>
+            </a:r>
+          </a:p>
+        </p:txBody>
+      </p:sp>
       <p:grpSp>
         <p:nvGrpSpPr>
-          <p:cNvPr id="2" name="Group 1"/>
+          <p:cNvPr id="3" name="Window quote.txt">
+            <a:extLst>
+              <a:ext uri="{C183D7F6-B498-43B3-948B-1728B52AA6E4}">
+                <adec:decorative xmlns:adec="http://schemas.microsoft.com/office/drawing/2017/decorative" val="1"/>
+              </a:ext>
+            </a:extLst>
+          </p:cNvPr>
           <p:cNvGrpSpPr/>
           <p:nvPr/>
         </p:nvGrpSpPr>
@@ -9151,7 +9756,7 @@
         </p:grpSpPr>
         <p:sp>
           <p:nvSpPr>
-            <p:cNvPr id="3" name="Rectangle 2"/>
+            <p:cNvPr id="4" name="Rectangle 3"/>
             <p:cNvSpPr/>
             <p:nvPr/>
           </p:nvSpPr>
@@ -9195,7 +9800,7 @@
         </p:sp>
         <p:sp>
           <p:nvSpPr>
-            <p:cNvPr id="4" name="Rectangle 3"/>
+            <p:cNvPr id="5" name="Rectangle 4"/>
             <p:cNvSpPr/>
             <p:nvPr/>
           </p:nvSpPr>
@@ -9241,7 +9846,7 @@
         </p:sp>
         <p:sp>
           <p:nvSpPr>
-            <p:cNvPr id="5" name="Rectangle 4"/>
+            <p:cNvPr id="6" name="Rectangle 5"/>
             <p:cNvSpPr/>
             <p:nvPr/>
           </p:nvSpPr>
@@ -9287,7 +9892,7 @@
         </p:sp>
         <p:sp>
           <p:nvSpPr>
-            <p:cNvPr id="6" name="Rectangle 5"/>
+            <p:cNvPr id="7" name="Rectangle 6"/>
             <p:cNvSpPr/>
             <p:nvPr/>
           </p:nvSpPr>
@@ -9333,7 +9938,7 @@
         </p:sp>
         <p:sp>
           <p:nvSpPr>
-            <p:cNvPr id="7" name="Rectangle 6"/>
+            <p:cNvPr id="8" name="Rectangle 7"/>
             <p:cNvSpPr/>
             <p:nvPr/>
           </p:nvSpPr>
@@ -9379,7 +9984,7 @@
         </p:sp>
         <p:sp>
           <p:nvSpPr>
-            <p:cNvPr id="8" name="Rectangle 7"/>
+            <p:cNvPr id="9" name="Rectangle 8"/>
             <p:cNvSpPr/>
             <p:nvPr/>
           </p:nvSpPr>
@@ -9425,7 +10030,7 @@
         </p:sp>
         <p:sp>
           <p:nvSpPr>
-            <p:cNvPr id="9" name="TextBox 8"/>
+            <p:cNvPr id="10" name="TextBox 9"/>
             <p:cNvSpPr txBox="1"/>
             <p:nvPr/>
           </p:nvSpPr>
@@ -9460,7 +10065,7 @@
       </p:grpSp>
       <p:sp>
         <p:nvSpPr>
-          <p:cNvPr id="10" name="TextBox 9"/>
+          <p:cNvPr id="11" name="TextBox 10"/>
           <p:cNvSpPr txBox="1"/>
           <p:nvPr/>
         </p:nvSpPr>
@@ -9494,7 +10099,7 @@
       </p:sp>
       <p:sp>
         <p:nvSpPr>
-          <p:cNvPr id="11" name="TextBox 10"/>
+          <p:cNvPr id="12" name="TextBox 11"/>
           <p:cNvSpPr txBox="1"/>
           <p:nvPr/>
         </p:nvSpPr>
@@ -9563,9 +10168,41 @@
         <p:nvPr/>
       </p:nvGrpSpPr>
       <p:grpSpPr/>
+      <p:sp>
+        <p:nvSpPr>
+          <p:cNvPr id="2" name="Title 1"/>
+          <p:cNvSpPr>
+            <a:spLocks noGrp="1"/>
+          </p:cNvSpPr>
+          <p:nvPr>
+            <p:ph type="title"/>
+          </p:nvPr>
+        </p:nvSpPr>
+        <p:spPr>
+          <a:xfrm>
+            <a:off x="-12191695" y="0"/>
+            <a:ext cx="12191695" cy="914400"/>
+          </a:xfrm>
+        </p:spPr>
+        <p:txBody>
+          <a:bodyPr/>
+          <a:lstStyle/>
+          <a:p>
+            <a:r>
+              <a:t>Hype check: AI-written code still needs people who test it</a:t>
+            </a:r>
+          </a:p>
+        </p:txBody>
+      </p:sp>
       <p:grpSp>
         <p:nvGrpSpPr>
-          <p:cNvPr id="2" name="Group 1"/>
+          <p:cNvPr id="3" name="Window image.png">
+            <a:extLst>
+              <a:ext uri="{C183D7F6-B498-43B3-948B-1728B52AA6E4}">
+                <adec:decorative xmlns:adec="http://schemas.microsoft.com/office/drawing/2017/decorative" val="1"/>
+              </a:ext>
+            </a:extLst>
+          </p:cNvPr>
           <p:cNvGrpSpPr/>
           <p:nvPr/>
         </p:nvGrpSpPr>
@@ -9579,7 +10216,7 @@
         </p:grpSpPr>
         <p:sp>
           <p:nvSpPr>
-            <p:cNvPr id="3" name="Rectangle 2"/>
+            <p:cNvPr id="4" name="Rectangle 3"/>
             <p:cNvSpPr/>
             <p:nvPr/>
           </p:nvSpPr>
@@ -9623,7 +10260,7 @@
         </p:sp>
         <p:sp>
           <p:nvSpPr>
-            <p:cNvPr id="4" name="Rectangle 3"/>
+            <p:cNvPr id="5" name="Rectangle 4"/>
             <p:cNvSpPr/>
             <p:nvPr/>
           </p:nvSpPr>
@@ -9669,7 +10306,7 @@
         </p:sp>
         <p:sp>
           <p:nvSpPr>
-            <p:cNvPr id="5" name="Rectangle 4"/>
+            <p:cNvPr id="6" name="Rectangle 5"/>
             <p:cNvSpPr/>
             <p:nvPr/>
           </p:nvSpPr>
@@ -9715,7 +10352,7 @@
         </p:sp>
         <p:sp>
           <p:nvSpPr>
-            <p:cNvPr id="6" name="Rectangle 5"/>
+            <p:cNvPr id="7" name="Rectangle 6"/>
             <p:cNvSpPr/>
             <p:nvPr/>
           </p:nvSpPr>
@@ -9761,7 +10398,7 @@
         </p:sp>
         <p:sp>
           <p:nvSpPr>
-            <p:cNvPr id="7" name="Rectangle 6"/>
+            <p:cNvPr id="8" name="Rectangle 7"/>
             <p:cNvSpPr/>
             <p:nvPr/>
           </p:nvSpPr>
@@ -9807,7 +10444,7 @@
         </p:sp>
         <p:sp>
           <p:nvSpPr>
-            <p:cNvPr id="8" name="Rectangle 7"/>
+            <p:cNvPr id="9" name="Rectangle 8"/>
             <p:cNvSpPr/>
             <p:nvPr/>
           </p:nvSpPr>
@@ -9853,7 +10490,7 @@
         </p:sp>
         <p:sp>
           <p:nvSpPr>
-            <p:cNvPr id="9" name="TextBox 8"/>
+            <p:cNvPr id="10" name="TextBox 9"/>
             <p:cNvSpPr txBox="1"/>
             <p:nvPr/>
           </p:nvSpPr>
@@ -9888,7 +10525,7 @@
       </p:grpSp>
       <p:pic>
         <p:nvPicPr>
-          <p:cNvPr id="10" name="Picture 9" descr="NPR article 'Tech CEOs say the era of code by AI is here. Some software engineers are skeptical,' with an illustration of a brain in a birdcage."/>
+          <p:cNvPr id="11" name="Picture 10" descr="NPR article 'Tech CEOs say the era of code by AI is here. Some software engineers are skeptical,' with an illustration of a brain in a birdcage."/>
           <p:cNvPicPr>
             <a:picLocks noChangeAspect="1"/>
           </p:cNvPicPr>
@@ -9912,13 +10549,13 @@
       </p:pic>
       <p:sp>
         <p:nvSpPr>
-          <p:cNvPr id="11" name="TextBox 10"/>
+          <p:cNvPr id="12" name="TextBox 11"/>
           <p:cNvSpPr txBox="1"/>
           <p:nvPr/>
         </p:nvSpPr>
         <p:spPr>
           <a:xfrm>
-            <a:off x="822960" y="5989320"/>
+            <a:off x="822960" y="5943600"/>
             <a:ext cx="10545775" cy="731520"/>
           </a:xfrm>
           <a:prstGeom prst="rect">
@@ -9983,14 +10620,40 @@
       <p:grpSpPr/>
       <p:sp>
         <p:nvSpPr>
-          <p:cNvPr id="2" name="TextBox 1"/>
+          <p:cNvPr id="2" name="Title 1"/>
+          <p:cNvSpPr>
+            <a:spLocks noGrp="1"/>
+          </p:cNvSpPr>
+          <p:nvPr>
+            <p:ph type="title"/>
+          </p:nvPr>
+        </p:nvSpPr>
+        <p:spPr>
+          <a:xfrm>
+            <a:off x="-12191695" y="0"/>
+            <a:ext cx="12191695" cy="914400"/>
+          </a:xfrm>
+        </p:spPr>
+        <p:txBody>
+          <a:bodyPr/>
+          <a:lstStyle/>
+          <a:p>
+            <a:r>
+              <a:t>Next week, Do: Build a Mini-Exhibit</a:t>
+            </a:r>
+          </a:p>
+        </p:txBody>
+      </p:sp>
+      <p:sp>
+        <p:nvSpPr>
+          <p:cNvPr id="3" name="TextBox 2"/>
           <p:cNvSpPr txBox="1"/>
           <p:nvPr/>
         </p:nvSpPr>
         <p:spPr>
           <a:xfrm>
-            <a:off x="731520" y="1463040"/>
-            <a:ext cx="10728655" cy="2926080"/>
+            <a:off x="274320" y="1417320"/>
+            <a:ext cx="11643055" cy="4023360"/>
           </a:xfrm>
           <a:prstGeom prst="rect">
             <a:avLst/>
@@ -10011,13 +10674,27 @@
                 </a:solidFill>
                 <a:latin typeface="Arial Black"/>
               </a:rPr>
-              <a:t>Next week, Do: Build a Mini-Exhibit</a:t>
-            </a:r>
-          </a:p>
-          <a:p>
-            <a:pPr algn="ctr"/>
-            <a:r>
-              <a:rPr sz="2800" b="0" i="0">
+              <a:t>Next week, Do:</a:t>
+            </a:r>
+            <a:br/>
+            <a:r>
+              <a:rPr sz="5400" b="0" i="0">
+                <a:solidFill>
+                  <a:srgbClr val="1B1035"/>
+                </a:solidFill>
+                <a:latin typeface="Arial Black"/>
+              </a:rPr>
+              <a:t>Build a Mini-Exhibit</a:t>
+            </a:r>
+          </a:p>
+          <a:p>
+            <a:pPr algn="ctr">
+              <a:spcBef>
+                <a:spcPts val="1000"/>
+              </a:spcBef>
+            </a:pPr>
+            <a:r>
+              <a:rPr sz="2400" b="0" i="0">
                 <a:solidFill>
                   <a:srgbClr val="1B1035"/>
                 </a:solidFill>
@@ -10056,7 +10733,33 @@
       <p:grpSpPr/>
       <p:sp>
         <p:nvSpPr>
-          <p:cNvPr id="2" name="TextBox 1"/>
+          <p:cNvPr id="2" name="Title 1"/>
+          <p:cNvSpPr>
+            <a:spLocks noGrp="1"/>
+          </p:cNvSpPr>
+          <p:nvPr>
+            <p:ph type="title"/>
+          </p:nvPr>
+        </p:nvSpPr>
+        <p:spPr>
+          <a:xfrm>
+            <a:off x="-12191695" y="0"/>
+            <a:ext cx="12191695" cy="914400"/>
+          </a:xfrm>
+        </p:spPr>
+        <p:txBody>
+          <a:bodyPr/>
+          <a:lstStyle/>
+          <a:p>
+            <a:r>
+              <a:t>Five steps</a:t>
+            </a:r>
+          </a:p>
+        </p:txBody>
+      </p:sp>
+      <p:sp>
+        <p:nvSpPr>
+          <p:cNvPr id="3" name="TextBox 2"/>
           <p:cNvSpPr txBox="1"/>
           <p:nvPr/>
         </p:nvSpPr>
@@ -10090,7 +10793,7 @@
       </p:sp>
       <p:sp>
         <p:nvSpPr>
-          <p:cNvPr id="3" name="TextBox 2"/>
+          <p:cNvPr id="4" name="TextBox 3"/>
           <p:cNvSpPr txBox="1"/>
           <p:nvPr/>
         </p:nvSpPr>
@@ -10267,9 +10970,41 @@
         <p:nvPr/>
       </p:nvGrpSpPr>
       <p:grpSpPr/>
+      <p:sp>
+        <p:nvSpPr>
+          <p:cNvPr id="2" name="Title 1"/>
+          <p:cNvSpPr>
+            <a:spLocks noGrp="1"/>
+          </p:cNvSpPr>
+          <p:nvPr>
+            <p:ph type="title"/>
+          </p:nvPr>
+        </p:nvSpPr>
+        <p:spPr>
+          <a:xfrm>
+            <a:off x="-12191695" y="0"/>
+            <a:ext cx="12191695" cy="914400"/>
+          </a:xfrm>
+        </p:spPr>
+        <p:txBody>
+          <a:bodyPr/>
+          <a:lstStyle/>
+          <a:p>
+            <a:r>
+              <a:t>Prompt: an example first prompt</a:t>
+            </a:r>
+          </a:p>
+        </p:txBody>
+      </p:sp>
       <p:grpSp>
         <p:nvGrpSpPr>
-          <p:cNvPr id="2" name="Group 1"/>
+          <p:cNvPr id="3" name="Window prompt.exe">
+            <a:extLst>
+              <a:ext uri="{C183D7F6-B498-43B3-948B-1728B52AA6E4}">
+                <adec:decorative xmlns:adec="http://schemas.microsoft.com/office/drawing/2017/decorative" val="1"/>
+              </a:ext>
+            </a:extLst>
+          </p:cNvPr>
           <p:cNvGrpSpPr/>
           <p:nvPr/>
         </p:nvGrpSpPr>
@@ -10283,7 +11018,7 @@
         </p:grpSpPr>
         <p:sp>
           <p:nvSpPr>
-            <p:cNvPr id="3" name="Rectangle 2"/>
+            <p:cNvPr id="4" name="Rectangle 3"/>
             <p:cNvSpPr/>
             <p:nvPr/>
           </p:nvSpPr>
@@ -10327,7 +11062,7 @@
         </p:sp>
         <p:sp>
           <p:nvSpPr>
-            <p:cNvPr id="4" name="Rectangle 3"/>
+            <p:cNvPr id="5" name="Rectangle 4"/>
             <p:cNvSpPr/>
             <p:nvPr/>
           </p:nvSpPr>
@@ -10373,7 +11108,7 @@
         </p:sp>
         <p:sp>
           <p:nvSpPr>
-            <p:cNvPr id="5" name="Rectangle 4"/>
+            <p:cNvPr id="6" name="Rectangle 5"/>
             <p:cNvSpPr/>
             <p:nvPr/>
           </p:nvSpPr>
@@ -10419,7 +11154,7 @@
         </p:sp>
         <p:sp>
           <p:nvSpPr>
-            <p:cNvPr id="6" name="Rectangle 5"/>
+            <p:cNvPr id="7" name="Rectangle 6"/>
             <p:cNvSpPr/>
             <p:nvPr/>
           </p:nvSpPr>
@@ -10465,7 +11200,7 @@
         </p:sp>
         <p:sp>
           <p:nvSpPr>
-            <p:cNvPr id="7" name="Rectangle 6"/>
+            <p:cNvPr id="8" name="Rectangle 7"/>
             <p:cNvSpPr/>
             <p:nvPr/>
           </p:nvSpPr>
@@ -10511,7 +11246,7 @@
         </p:sp>
         <p:sp>
           <p:nvSpPr>
-            <p:cNvPr id="8" name="Rectangle 7"/>
+            <p:cNvPr id="9" name="Rectangle 8"/>
             <p:cNvSpPr/>
             <p:nvPr/>
           </p:nvSpPr>
@@ -10557,7 +11292,7 @@
         </p:sp>
         <p:sp>
           <p:nvSpPr>
-            <p:cNvPr id="9" name="TextBox 8"/>
+            <p:cNvPr id="10" name="TextBox 9"/>
             <p:cNvSpPr txBox="1"/>
             <p:nvPr/>
           </p:nvSpPr>
@@ -10592,7 +11327,7 @@
       </p:grpSp>
       <p:sp>
         <p:nvSpPr>
-          <p:cNvPr id="10" name="TextBox 9"/>
+          <p:cNvPr id="11" name="TextBox 10"/>
           <p:cNvSpPr txBox="1"/>
           <p:nvPr/>
         </p:nvSpPr>
@@ -10623,17 +11358,22 @@
             </a:r>
           </a:p>
           <a:p>
-            <a:r>
-              <a:rPr sz="2800" b="1" i="0">
+            <a:pPr>
+              <a:spcBef>
+                <a:spcPts val="600"/>
+              </a:spcBef>
+            </a:pPr>
+            <a:r>
+              <a:rPr sz="2600" b="1" i="0">
                 <a:solidFill>
                   <a:srgbClr val="FFD23F"/>
                 </a:solidFill>
                 <a:latin typeface="Courier New"/>
               </a:rPr>
-              <a:t>&gt;</a:t>
-            </a:r>
-            <a:r>
-              <a:rPr sz="2800" b="0" i="0">
+              <a:t>&gt; </a:t>
+            </a:r>
+            <a:r>
+              <a:rPr sz="2600" b="0" i="0">
                 <a:solidFill>
                   <a:srgbClr val="7DFFB3"/>
                 </a:solidFill>
@@ -10670,9 +11410,41 @@
         <p:nvPr/>
       </p:nvGrpSpPr>
       <p:grpSpPr/>
+      <p:sp>
+        <p:nvSpPr>
+          <p:cNvPr id="2" name="Title 1"/>
+          <p:cNvSpPr>
+            <a:spLocks noGrp="1"/>
+          </p:cNvSpPr>
+          <p:nvPr>
+            <p:ph type="title"/>
+          </p:nvPr>
+        </p:nvSpPr>
+        <p:spPr>
+          <a:xfrm>
+            <a:off x="-12191695" y="0"/>
+            <a:ext cx="12191695" cy="914400"/>
+          </a:xfrm>
+        </p:spPr>
+        <p:txBody>
+          <a:bodyPr/>
+          <a:lstStyle/>
+          <a:p>
+            <a:r>
+              <a:t>Discussion question</a:t>
+            </a:r>
+          </a:p>
+        </p:txBody>
+      </p:sp>
       <p:grpSp>
         <p:nvGrpSpPr>
-          <p:cNvPr id="2" name="Group 1"/>
+          <p:cNvPr id="3" name="Window discuss.txt">
+            <a:extLst>
+              <a:ext uri="{C183D7F6-B498-43B3-948B-1728B52AA6E4}">
+                <adec:decorative xmlns:adec="http://schemas.microsoft.com/office/drawing/2017/decorative" val="1"/>
+              </a:ext>
+            </a:extLst>
+          </p:cNvPr>
           <p:cNvGrpSpPr/>
           <p:nvPr/>
         </p:nvGrpSpPr>
@@ -10686,7 +11458,7 @@
         </p:grpSpPr>
         <p:sp>
           <p:nvSpPr>
-            <p:cNvPr id="3" name="Rectangle 2"/>
+            <p:cNvPr id="4" name="Rectangle 3"/>
             <p:cNvSpPr/>
             <p:nvPr/>
           </p:nvSpPr>
@@ -10730,7 +11502,7 @@
         </p:sp>
         <p:sp>
           <p:nvSpPr>
-            <p:cNvPr id="4" name="Rectangle 3"/>
+            <p:cNvPr id="5" name="Rectangle 4"/>
             <p:cNvSpPr/>
             <p:nvPr/>
           </p:nvSpPr>
@@ -10776,7 +11548,7 @@
         </p:sp>
         <p:sp>
           <p:nvSpPr>
-            <p:cNvPr id="5" name="Rectangle 4"/>
+            <p:cNvPr id="6" name="Rectangle 5"/>
             <p:cNvSpPr/>
             <p:nvPr/>
           </p:nvSpPr>
@@ -10822,7 +11594,7 @@
         </p:sp>
         <p:sp>
           <p:nvSpPr>
-            <p:cNvPr id="6" name="Rectangle 5"/>
+            <p:cNvPr id="7" name="Rectangle 6"/>
             <p:cNvSpPr/>
             <p:nvPr/>
           </p:nvSpPr>
@@ -10868,7 +11640,7 @@
         </p:sp>
         <p:sp>
           <p:nvSpPr>
-            <p:cNvPr id="7" name="Rectangle 6"/>
+            <p:cNvPr id="8" name="Rectangle 7"/>
             <p:cNvSpPr/>
             <p:nvPr/>
           </p:nvSpPr>
@@ -10914,7 +11686,7 @@
         </p:sp>
         <p:sp>
           <p:nvSpPr>
-            <p:cNvPr id="8" name="Rectangle 7"/>
+            <p:cNvPr id="9" name="Rectangle 8"/>
             <p:cNvSpPr/>
             <p:nvPr/>
           </p:nvSpPr>
@@ -10960,7 +11732,7 @@
         </p:sp>
         <p:sp>
           <p:nvSpPr>
-            <p:cNvPr id="9" name="TextBox 8"/>
+            <p:cNvPr id="10" name="TextBox 9"/>
             <p:cNvSpPr txBox="1"/>
             <p:nvPr/>
           </p:nvSpPr>
@@ -10995,7 +11767,7 @@
       </p:grpSp>
       <p:sp>
         <p:nvSpPr>
-          <p:cNvPr id="10" name="TextBox 9"/>
+          <p:cNvPr id="11" name="TextBox 10"/>
           <p:cNvSpPr txBox="1"/>
           <p:nvPr/>
         </p:nvSpPr>
@@ -11026,6 +11798,11 @@
             </a:r>
           </a:p>
           <a:p>
+            <a:pPr>
+              <a:spcBef>
+                <a:spcPts val="1200"/>
+              </a:spcBef>
+            </a:pPr>
             <a:r>
               <a:rPr sz="2000" b="0" i="0">
                 <a:solidFill>
@@ -11064,9 +11841,41 @@
         <p:nvPr/>
       </p:nvGrpSpPr>
       <p:grpSpPr/>
+      <p:sp>
+        <p:nvSpPr>
+          <p:cNvPr id="2" name="Title 1"/>
+          <p:cNvSpPr>
+            <a:spLocks noGrp="1"/>
+          </p:cNvSpPr>
+          <p:nvPr>
+            <p:ph type="title"/>
+          </p:nvPr>
+        </p:nvSpPr>
+        <p:spPr>
+          <a:xfrm>
+            <a:off x="-12191695" y="0"/>
+            <a:ext cx="12191695" cy="914400"/>
+          </a:xfrm>
+        </p:spPr>
+        <p:txBody>
+          <a:bodyPr/>
+          <a:lstStyle/>
+          <a:p>
+            <a:r>
+              <a:t>Quote: Simon Willison, 2025</a:t>
+            </a:r>
+          </a:p>
+        </p:txBody>
+      </p:sp>
       <p:grpSp>
         <p:nvGrpSpPr>
-          <p:cNvPr id="2" name="Group 1"/>
+          <p:cNvPr id="3" name="Window quote.txt">
+            <a:extLst>
+              <a:ext uri="{C183D7F6-B498-43B3-948B-1728B52AA6E4}">
+                <adec:decorative xmlns:adec="http://schemas.microsoft.com/office/drawing/2017/decorative" val="1"/>
+              </a:ext>
+            </a:extLst>
+          </p:cNvPr>
           <p:cNvGrpSpPr/>
           <p:nvPr/>
         </p:nvGrpSpPr>
@@ -11080,7 +11889,7 @@
         </p:grpSpPr>
         <p:sp>
           <p:nvSpPr>
-            <p:cNvPr id="3" name="Rectangle 2"/>
+            <p:cNvPr id="4" name="Rectangle 3"/>
             <p:cNvSpPr/>
             <p:nvPr/>
           </p:nvSpPr>
@@ -11124,7 +11933,7 @@
         </p:sp>
         <p:sp>
           <p:nvSpPr>
-            <p:cNvPr id="4" name="Rectangle 3"/>
+            <p:cNvPr id="5" name="Rectangle 4"/>
             <p:cNvSpPr/>
             <p:nvPr/>
           </p:nvSpPr>
@@ -11170,7 +11979,7 @@
         </p:sp>
         <p:sp>
           <p:nvSpPr>
-            <p:cNvPr id="5" name="Rectangle 4"/>
+            <p:cNvPr id="6" name="Rectangle 5"/>
             <p:cNvSpPr/>
             <p:nvPr/>
           </p:nvSpPr>
@@ -11216,7 +12025,7 @@
         </p:sp>
         <p:sp>
           <p:nvSpPr>
-            <p:cNvPr id="6" name="Rectangle 5"/>
+            <p:cNvPr id="7" name="Rectangle 6"/>
             <p:cNvSpPr/>
             <p:nvPr/>
           </p:nvSpPr>
@@ -11262,7 +12071,7 @@
         </p:sp>
         <p:sp>
           <p:nvSpPr>
-            <p:cNvPr id="7" name="Rectangle 6"/>
+            <p:cNvPr id="8" name="Rectangle 7"/>
             <p:cNvSpPr/>
             <p:nvPr/>
           </p:nvSpPr>
@@ -11308,7 +12117,7 @@
         </p:sp>
         <p:sp>
           <p:nvSpPr>
-            <p:cNvPr id="8" name="Rectangle 7"/>
+            <p:cNvPr id="9" name="Rectangle 8"/>
             <p:cNvSpPr/>
             <p:nvPr/>
           </p:nvSpPr>
@@ -11354,7 +12163,7 @@
         </p:sp>
         <p:sp>
           <p:nvSpPr>
-            <p:cNvPr id="9" name="TextBox 8"/>
+            <p:cNvPr id="10" name="TextBox 9"/>
             <p:cNvSpPr txBox="1"/>
             <p:nvPr/>
           </p:nvSpPr>
@@ -11389,7 +12198,7 @@
       </p:grpSp>
       <p:sp>
         <p:nvSpPr>
-          <p:cNvPr id="10" name="TextBox 9"/>
+          <p:cNvPr id="11" name="TextBox 10"/>
           <p:cNvSpPr txBox="1"/>
           <p:nvPr/>
         </p:nvSpPr>
@@ -11410,7 +12219,7 @@
           <a:lstStyle/>
           <a:p>
             <a:r>
-              <a:rPr sz="2200" b="0" i="0">
+              <a:rPr sz="2800" b="0" i="0">
                 <a:solidFill>
                   <a:srgbClr val="1B1035"/>
                 </a:solidFill>
@@ -11423,7 +12232,7 @@
       </p:sp>
       <p:sp>
         <p:nvSpPr>
-          <p:cNvPr id="11" name="TextBox 10"/>
+          <p:cNvPr id="12" name="TextBox 11"/>
           <p:cNvSpPr txBox="1"/>
           <p:nvPr/>
         </p:nvSpPr>
@@ -11492,9 +12301,41 @@
         <p:nvPr/>
       </p:nvGrpSpPr>
       <p:grpSpPr/>
+      <p:sp>
+        <p:nvSpPr>
+          <p:cNvPr id="2" name="Title 1"/>
+          <p:cNvSpPr>
+            <a:spLocks noGrp="1"/>
+          </p:cNvSpPr>
+          <p:nvPr>
+            <p:ph type="title"/>
+          </p:nvPr>
+        </p:nvSpPr>
+        <p:spPr>
+          <a:xfrm>
+            <a:off x="-12191695" y="0"/>
+            <a:ext cx="12191695" cy="914400"/>
+          </a:xfrm>
+        </p:spPr>
+        <p:txBody>
+          <a:bodyPr/>
+          <a:lstStyle/>
+          <a:p>
+            <a:r>
+              <a:t>People have always argued about what counts as real programming (xkcd #378, CC BY-NC 2.5)</a:t>
+            </a:r>
+          </a:p>
+        </p:txBody>
+      </p:sp>
       <p:grpSp>
         <p:nvGrpSpPr>
-          <p:cNvPr id="2" name="Group 1"/>
+          <p:cNvPr id="3" name="Window image.png">
+            <a:extLst>
+              <a:ext uri="{C183D7F6-B498-43B3-948B-1728B52AA6E4}">
+                <adec:decorative xmlns:adec="http://schemas.microsoft.com/office/drawing/2017/decorative" val="1"/>
+              </a:ext>
+            </a:extLst>
+          </p:cNvPr>
           <p:cNvGrpSpPr/>
           <p:nvPr/>
         </p:nvGrpSpPr>
@@ -11508,7 +12349,7 @@
         </p:grpSpPr>
         <p:sp>
           <p:nvSpPr>
-            <p:cNvPr id="3" name="Rectangle 2"/>
+            <p:cNvPr id="4" name="Rectangle 3"/>
             <p:cNvSpPr/>
             <p:nvPr/>
           </p:nvSpPr>
@@ -11552,7 +12393,7 @@
         </p:sp>
         <p:sp>
           <p:nvSpPr>
-            <p:cNvPr id="4" name="Rectangle 3"/>
+            <p:cNvPr id="5" name="Rectangle 4"/>
             <p:cNvSpPr/>
             <p:nvPr/>
           </p:nvSpPr>
@@ -11598,7 +12439,7 @@
         </p:sp>
         <p:sp>
           <p:nvSpPr>
-            <p:cNvPr id="5" name="Rectangle 4"/>
+            <p:cNvPr id="6" name="Rectangle 5"/>
             <p:cNvSpPr/>
             <p:nvPr/>
           </p:nvSpPr>
@@ -11644,7 +12485,7 @@
         </p:sp>
         <p:sp>
           <p:nvSpPr>
-            <p:cNvPr id="6" name="Rectangle 5"/>
+            <p:cNvPr id="7" name="Rectangle 6"/>
             <p:cNvSpPr/>
             <p:nvPr/>
           </p:nvSpPr>
@@ -11690,7 +12531,7 @@
         </p:sp>
         <p:sp>
           <p:nvSpPr>
-            <p:cNvPr id="7" name="Rectangle 6"/>
+            <p:cNvPr id="8" name="Rectangle 7"/>
             <p:cNvSpPr/>
             <p:nvPr/>
           </p:nvSpPr>
@@ -11736,7 +12577,7 @@
         </p:sp>
         <p:sp>
           <p:nvSpPr>
-            <p:cNvPr id="8" name="Rectangle 7"/>
+            <p:cNvPr id="9" name="Rectangle 8"/>
             <p:cNvSpPr/>
             <p:nvPr/>
           </p:nvSpPr>
@@ -11782,7 +12623,7 @@
         </p:sp>
         <p:sp>
           <p:nvSpPr>
-            <p:cNvPr id="9" name="TextBox 8"/>
+            <p:cNvPr id="10" name="TextBox 9"/>
             <p:cNvSpPr txBox="1"/>
             <p:nvPr/>
           </p:nvSpPr>
@@ -11817,7 +12658,7 @@
       </p:grpSp>
       <p:pic>
         <p:nvPicPr>
-          <p:cNvPr id="10" name="Picture 9" descr="Comic strip of stick figures one-upping each other: 'Real programmers use emacs,' 'vim,' 'ed,' 'cat,' 'a magnetized needle and a steady hand,' and finally 'butterflies.'"/>
+          <p:cNvPr id="11" name="Picture 10" descr="Comic strip of stick figures one-upping each other: 'Real programmers use emacs,' 'vim,' 'ed,' 'cat,' 'a magnetized needle and a steady hand,' and finally 'butterflies.'"/>
           <p:cNvPicPr>
             <a:picLocks noChangeAspect="1"/>
           </p:cNvPicPr>
@@ -11841,13 +12682,13 @@
       </p:pic>
       <p:sp>
         <p:nvSpPr>
-          <p:cNvPr id="11" name="TextBox 10"/>
+          <p:cNvPr id="12" name="TextBox 11"/>
           <p:cNvSpPr txBox="1"/>
           <p:nvPr/>
         </p:nvSpPr>
         <p:spPr>
           <a:xfrm>
-            <a:off x="822960" y="5989320"/>
+            <a:off x="822960" y="5943600"/>
             <a:ext cx="10545775" cy="731520"/>
           </a:xfrm>
           <a:prstGeom prst="rect">
@@ -11863,7 +12704,7 @@
           <a:p>
             <a:pPr algn="ctr"/>
             <a:r>
-              <a:rPr sz="1800" b="0" i="0">
+              <a:rPr sz="1600" b="0" i="0">
                 <a:solidFill>
                   <a:srgbClr val="1B1035"/>
                 </a:solidFill>
@@ -11872,7 +12713,7 @@
               <a:t>People have always argued about what counts as real programming (xkcd #378, CC BY-NC 2.5) </a:t>
             </a:r>
             <a:r>
-              <a:rPr sz="1800" b="0" i="0">
+              <a:rPr sz="1600" b="0" i="0">
                 <a:solidFill>
                   <a:srgbClr val="1B1035"/>
                 </a:solidFill>
@@ -11912,14 +12753,40 @@
       <p:grpSpPr/>
       <p:sp>
         <p:nvSpPr>
-          <p:cNvPr id="2" name="TextBox 1"/>
+          <p:cNvPr id="2" name="Title 1"/>
+          <p:cNvSpPr>
+            <a:spLocks noGrp="1"/>
+          </p:cNvSpPr>
+          <p:nvPr>
+            <p:ph type="title"/>
+          </p:nvPr>
+        </p:nvSpPr>
+        <p:spPr>
+          <a:xfrm>
+            <a:off x="-12191695" y="0"/>
+            <a:ext cx="12191695" cy="914400"/>
+          </a:xfrm>
+        </p:spPr>
+        <p:txBody>
+          <a:bodyPr/>
+          <a:lstStyle/>
+          <a:p>
+            <a:r>
+              <a:t>On building</a:t>
+            </a:r>
+          </a:p>
+        </p:txBody>
+      </p:sp>
+      <p:sp>
+        <p:nvSpPr>
+          <p:cNvPr id="3" name="TextBox 2"/>
           <p:cNvSpPr txBox="1"/>
           <p:nvPr/>
         </p:nvSpPr>
         <p:spPr>
           <a:xfrm>
-            <a:off x="731520" y="1463040"/>
-            <a:ext cx="10728655" cy="2926080"/>
+            <a:off x="274320" y="1417320"/>
+            <a:ext cx="11643055" cy="4023360"/>
           </a:xfrm>
           <a:prstGeom prst="rect">
             <a:avLst/>
@@ -11944,7 +12811,11 @@
             </a:r>
           </a:p>
           <a:p>
-            <a:pPr algn="ctr"/>
+            <a:pPr algn="ctr">
+              <a:spcBef>
+                <a:spcPts val="1000"/>
+              </a:spcBef>
+            </a:pPr>
             <a:r>
               <a:rPr sz="2800" b="0" i="0">
                 <a:solidFill>
@@ -11983,9 +12854,41 @@
         <p:nvPr/>
       </p:nvGrpSpPr>
       <p:grpSpPr/>
+      <p:sp>
+        <p:nvSpPr>
+          <p:cNvPr id="2" name="Title 1"/>
+          <p:cNvSpPr>
+            <a:spLocks noGrp="1"/>
+          </p:cNvSpPr>
+          <p:nvPr>
+            <p:ph type="title"/>
+          </p:nvPr>
+        </p:nvSpPr>
+        <p:spPr>
+          <a:xfrm>
+            <a:off x="-12191695" y="0"/>
+            <a:ext cx="12191695" cy="914400"/>
+          </a:xfrm>
+        </p:spPr>
+        <p:txBody>
+          <a:bodyPr/>
+          <a:lstStyle/>
+          <a:p>
+            <a:r>
+              <a:t>Quote: Stephen Ramsay, 2011</a:t>
+            </a:r>
+          </a:p>
+        </p:txBody>
+      </p:sp>
       <p:grpSp>
         <p:nvGrpSpPr>
-          <p:cNvPr id="2" name="Group 1"/>
+          <p:cNvPr id="3" name="Window quote.txt">
+            <a:extLst>
+              <a:ext uri="{C183D7F6-B498-43B3-948B-1728B52AA6E4}">
+                <adec:decorative xmlns:adec="http://schemas.microsoft.com/office/drawing/2017/decorative" val="1"/>
+              </a:ext>
+            </a:extLst>
+          </p:cNvPr>
           <p:cNvGrpSpPr/>
           <p:nvPr/>
         </p:nvGrpSpPr>
@@ -11999,7 +12902,7 @@
         </p:grpSpPr>
         <p:sp>
           <p:nvSpPr>
-            <p:cNvPr id="3" name="Rectangle 2"/>
+            <p:cNvPr id="4" name="Rectangle 3"/>
             <p:cNvSpPr/>
             <p:nvPr/>
           </p:nvSpPr>
@@ -12043,7 +12946,7 @@
         </p:sp>
         <p:sp>
           <p:nvSpPr>
-            <p:cNvPr id="4" name="Rectangle 3"/>
+            <p:cNvPr id="5" name="Rectangle 4"/>
             <p:cNvSpPr/>
             <p:nvPr/>
           </p:nvSpPr>
@@ -12089,7 +12992,7 @@
         </p:sp>
         <p:sp>
           <p:nvSpPr>
-            <p:cNvPr id="5" name="Rectangle 4"/>
+            <p:cNvPr id="6" name="Rectangle 5"/>
             <p:cNvSpPr/>
             <p:nvPr/>
           </p:nvSpPr>
@@ -12135,7 +13038,7 @@
         </p:sp>
         <p:sp>
           <p:nvSpPr>
-            <p:cNvPr id="6" name="Rectangle 5"/>
+            <p:cNvPr id="7" name="Rectangle 6"/>
             <p:cNvSpPr/>
             <p:nvPr/>
           </p:nvSpPr>
@@ -12181,7 +13084,7 @@
         </p:sp>
         <p:sp>
           <p:nvSpPr>
-            <p:cNvPr id="7" name="Rectangle 6"/>
+            <p:cNvPr id="8" name="Rectangle 7"/>
             <p:cNvSpPr/>
             <p:nvPr/>
           </p:nvSpPr>
@@ -12227,7 +13130,7 @@
         </p:sp>
         <p:sp>
           <p:nvSpPr>
-            <p:cNvPr id="8" name="Rectangle 7"/>
+            <p:cNvPr id="9" name="Rectangle 8"/>
             <p:cNvSpPr/>
             <p:nvPr/>
           </p:nvSpPr>
@@ -12273,7 +13176,7 @@
         </p:sp>
         <p:sp>
           <p:nvSpPr>
-            <p:cNvPr id="9" name="TextBox 8"/>
+            <p:cNvPr id="10" name="TextBox 9"/>
             <p:cNvSpPr txBox="1"/>
             <p:nvPr/>
           </p:nvSpPr>
@@ -12308,7 +13211,7 @@
       </p:grpSp>
       <p:sp>
         <p:nvSpPr>
-          <p:cNvPr id="10" name="TextBox 9"/>
+          <p:cNvPr id="11" name="TextBox 10"/>
           <p:cNvSpPr txBox="1"/>
           <p:nvPr/>
         </p:nvSpPr>
@@ -12329,7 +13232,7 @@
           <a:lstStyle/>
           <a:p>
             <a:r>
-              <a:rPr sz="2200" b="0" i="0">
+              <a:rPr sz="2800" b="0" i="0">
                 <a:solidFill>
                   <a:srgbClr val="1B1035"/>
                 </a:solidFill>
@@ -12342,7 +13245,7 @@
       </p:sp>
       <p:sp>
         <p:nvSpPr>
-          <p:cNvPr id="11" name="TextBox 10"/>
+          <p:cNvPr id="12" name="TextBox 11"/>
           <p:cNvSpPr txBox="1"/>
           <p:nvPr/>
         </p:nvSpPr>
@@ -12411,9 +13314,41 @@
         <p:nvPr/>
       </p:nvGrpSpPr>
       <p:grpSpPr/>
+      <p:sp>
+        <p:nvSpPr>
+          <p:cNvPr id="2" name="Title 1"/>
+          <p:cNvSpPr>
+            <a:spLocks noGrp="1"/>
+          </p:cNvSpPr>
+          <p:nvPr>
+            <p:ph type="title"/>
+          </p:nvPr>
+        </p:nvSpPr>
+        <p:spPr>
+          <a:xfrm>
+            <a:off x="-12191695" y="0"/>
+            <a:ext cx="12191695" cy="914400"/>
+          </a:xfrm>
+        </p:spPr>
+        <p:txBody>
+          <a:bodyPr/>
+          <a:lstStyle/>
+          <a:p>
+            <a:r>
+              <a:t>Quote: Stephen Ramsay, 2011</a:t>
+            </a:r>
+          </a:p>
+        </p:txBody>
+      </p:sp>
       <p:grpSp>
         <p:nvGrpSpPr>
-          <p:cNvPr id="2" name="Group 1"/>
+          <p:cNvPr id="3" name="Window quote.txt">
+            <a:extLst>
+              <a:ext uri="{C183D7F6-B498-43B3-948B-1728B52AA6E4}">
+                <adec:decorative xmlns:adec="http://schemas.microsoft.com/office/drawing/2017/decorative" val="1"/>
+              </a:ext>
+            </a:extLst>
+          </p:cNvPr>
           <p:cNvGrpSpPr/>
           <p:nvPr/>
         </p:nvGrpSpPr>
@@ -12427,7 +13362,7 @@
         </p:grpSpPr>
         <p:sp>
           <p:nvSpPr>
-            <p:cNvPr id="3" name="Rectangle 2"/>
+            <p:cNvPr id="4" name="Rectangle 3"/>
             <p:cNvSpPr/>
             <p:nvPr/>
           </p:nvSpPr>
@@ -12471,7 +13406,7 @@
         </p:sp>
         <p:sp>
           <p:nvSpPr>
-            <p:cNvPr id="4" name="Rectangle 3"/>
+            <p:cNvPr id="5" name="Rectangle 4"/>
             <p:cNvSpPr/>
             <p:nvPr/>
           </p:nvSpPr>
@@ -12517,7 +13452,7 @@
         </p:sp>
         <p:sp>
           <p:nvSpPr>
-            <p:cNvPr id="5" name="Rectangle 4"/>
+            <p:cNvPr id="6" name="Rectangle 5"/>
             <p:cNvSpPr/>
             <p:nvPr/>
           </p:nvSpPr>
@@ -12563,7 +13498,7 @@
         </p:sp>
         <p:sp>
           <p:nvSpPr>
-            <p:cNvPr id="6" name="Rectangle 5"/>
+            <p:cNvPr id="7" name="Rectangle 6"/>
             <p:cNvSpPr/>
             <p:nvPr/>
           </p:nvSpPr>
@@ -12609,7 +13544,7 @@
         </p:sp>
         <p:sp>
           <p:nvSpPr>
-            <p:cNvPr id="7" name="Rectangle 6"/>
+            <p:cNvPr id="8" name="Rectangle 7"/>
             <p:cNvSpPr/>
             <p:nvPr/>
           </p:nvSpPr>
@@ -12655,7 +13590,7 @@
         </p:sp>
         <p:sp>
           <p:nvSpPr>
-            <p:cNvPr id="8" name="Rectangle 7"/>
+            <p:cNvPr id="9" name="Rectangle 8"/>
             <p:cNvSpPr/>
             <p:nvPr/>
           </p:nvSpPr>
@@ -12701,7 +13636,7 @@
         </p:sp>
         <p:sp>
           <p:nvSpPr>
-            <p:cNvPr id="9" name="TextBox 8"/>
+            <p:cNvPr id="10" name="TextBox 9"/>
             <p:cNvSpPr txBox="1"/>
             <p:nvPr/>
           </p:nvSpPr>
@@ -12736,7 +13671,7 @@
       </p:grpSp>
       <p:sp>
         <p:nvSpPr>
-          <p:cNvPr id="10" name="TextBox 9"/>
+          <p:cNvPr id="11" name="TextBox 10"/>
           <p:cNvSpPr txBox="1"/>
           <p:nvPr/>
         </p:nvSpPr>
@@ -12770,7 +13705,7 @@
       </p:sp>
       <p:sp>
         <p:nvSpPr>
-          <p:cNvPr id="11" name="TextBox 10"/>
+          <p:cNvPr id="12" name="TextBox 11"/>
           <p:cNvSpPr txBox="1"/>
           <p:nvPr/>
         </p:nvSpPr>
@@ -12839,9 +13774,41 @@
         <p:nvPr/>
       </p:nvGrpSpPr>
       <p:grpSpPr/>
+      <p:sp>
+        <p:nvSpPr>
+          <p:cNvPr id="2" name="Title 1"/>
+          <p:cNvSpPr>
+            <a:spLocks noGrp="1"/>
+          </p:cNvSpPr>
+          <p:nvPr>
+            <p:ph type="title"/>
+          </p:nvPr>
+        </p:nvSpPr>
+        <p:spPr>
+          <a:xfrm>
+            <a:off x="-12191695" y="0"/>
+            <a:ext cx="12191695" cy="914400"/>
+          </a:xfrm>
+        </p:spPr>
+        <p:txBody>
+          <a:bodyPr/>
+          <a:lstStyle/>
+          <a:p>
+            <a:r>
+              <a:t>Quote: Stephen Ramsay, 2011</a:t>
+            </a:r>
+          </a:p>
+        </p:txBody>
+      </p:sp>
       <p:grpSp>
         <p:nvGrpSpPr>
-          <p:cNvPr id="2" name="Group 1"/>
+          <p:cNvPr id="3" name="Window quote.txt">
+            <a:extLst>
+              <a:ext uri="{C183D7F6-B498-43B3-948B-1728B52AA6E4}">
+                <adec:decorative xmlns:adec="http://schemas.microsoft.com/office/drawing/2017/decorative" val="1"/>
+              </a:ext>
+            </a:extLst>
+          </p:cNvPr>
           <p:cNvGrpSpPr/>
           <p:nvPr/>
         </p:nvGrpSpPr>
@@ -12855,7 +13822,7 @@
         </p:grpSpPr>
         <p:sp>
           <p:nvSpPr>
-            <p:cNvPr id="3" name="Rectangle 2"/>
+            <p:cNvPr id="4" name="Rectangle 3"/>
             <p:cNvSpPr/>
             <p:nvPr/>
           </p:nvSpPr>
@@ -12899,7 +13866,7 @@
         </p:sp>
         <p:sp>
           <p:nvSpPr>
-            <p:cNvPr id="4" name="Rectangle 3"/>
+            <p:cNvPr id="5" name="Rectangle 4"/>
             <p:cNvSpPr/>
             <p:nvPr/>
           </p:nvSpPr>
@@ -12945,7 +13912,7 @@
         </p:sp>
         <p:sp>
           <p:nvSpPr>
-            <p:cNvPr id="5" name="Rectangle 4"/>
+            <p:cNvPr id="6" name="Rectangle 5"/>
             <p:cNvSpPr/>
             <p:nvPr/>
           </p:nvSpPr>
@@ -12991,7 +13958,7 @@
         </p:sp>
         <p:sp>
           <p:nvSpPr>
-            <p:cNvPr id="6" name="Rectangle 5"/>
+            <p:cNvPr id="7" name="Rectangle 6"/>
             <p:cNvSpPr/>
             <p:nvPr/>
           </p:nvSpPr>
@@ -13037,7 +14004,7 @@
         </p:sp>
         <p:sp>
           <p:nvSpPr>
-            <p:cNvPr id="7" name="Rectangle 6"/>
+            <p:cNvPr id="8" name="Rectangle 7"/>
             <p:cNvSpPr/>
             <p:nvPr/>
           </p:nvSpPr>
@@ -13083,7 +14050,7 @@
         </p:sp>
         <p:sp>
           <p:nvSpPr>
-            <p:cNvPr id="8" name="Rectangle 7"/>
+            <p:cNvPr id="9" name="Rectangle 8"/>
             <p:cNvSpPr/>
             <p:nvPr/>
           </p:nvSpPr>
@@ -13129,7 +14096,7 @@
         </p:sp>
         <p:sp>
           <p:nvSpPr>
-            <p:cNvPr id="9" name="TextBox 8"/>
+            <p:cNvPr id="10" name="TextBox 9"/>
             <p:cNvSpPr txBox="1"/>
             <p:nvPr/>
           </p:nvSpPr>
@@ -13164,7 +14131,7 @@
       </p:grpSp>
       <p:sp>
         <p:nvSpPr>
-          <p:cNvPr id="10" name="TextBox 9"/>
+          <p:cNvPr id="11" name="TextBox 10"/>
           <p:cNvSpPr txBox="1"/>
           <p:nvPr/>
         </p:nvSpPr>
@@ -13185,7 +14152,7 @@
           <a:lstStyle/>
           <a:p>
             <a:r>
-              <a:rPr sz="2200" b="0" i="0">
+              <a:rPr sz="2800" b="0" i="0">
                 <a:solidFill>
                   <a:srgbClr val="1B1035"/>
                 </a:solidFill>
@@ -13198,7 +14165,7 @@
       </p:sp>
       <p:sp>
         <p:nvSpPr>
-          <p:cNvPr id="11" name="TextBox 10"/>
+          <p:cNvPr id="12" name="TextBox 11"/>
           <p:cNvSpPr txBox="1"/>
           <p:nvPr/>
         </p:nvSpPr>
@@ -13267,9 +14234,41 @@
         <p:nvPr/>
       </p:nvGrpSpPr>
       <p:grpSpPr/>
+      <p:sp>
+        <p:nvSpPr>
+          <p:cNvPr id="2" name="Title 1"/>
+          <p:cNvSpPr>
+            <a:spLocks noGrp="1"/>
+          </p:cNvSpPr>
+          <p:nvPr>
+            <p:ph type="title"/>
+          </p:nvPr>
+        </p:nvSpPr>
+        <p:spPr>
+          <a:xfrm>
+            <a:off x="-12191695" y="0"/>
+            <a:ext cx="12191695" cy="914400"/>
+          </a:xfrm>
+        </p:spPr>
+        <p:txBody>
+          <a:bodyPr/>
+          <a:lstStyle/>
+          <a:p>
+            <a:r>
+              <a:t>Quote: Stephen Ramsay, 2011</a:t>
+            </a:r>
+          </a:p>
+        </p:txBody>
+      </p:sp>
       <p:grpSp>
         <p:nvGrpSpPr>
-          <p:cNvPr id="2" name="Group 1"/>
+          <p:cNvPr id="3" name="Window quote.txt">
+            <a:extLst>
+              <a:ext uri="{C183D7F6-B498-43B3-948B-1728B52AA6E4}">
+                <adec:decorative xmlns:adec="http://schemas.microsoft.com/office/drawing/2017/decorative" val="1"/>
+              </a:ext>
+            </a:extLst>
+          </p:cNvPr>
           <p:cNvGrpSpPr/>
           <p:nvPr/>
         </p:nvGrpSpPr>
@@ -13283,7 +14282,7 @@
         </p:grpSpPr>
         <p:sp>
           <p:nvSpPr>
-            <p:cNvPr id="3" name="Rectangle 2"/>
+            <p:cNvPr id="4" name="Rectangle 3"/>
             <p:cNvSpPr/>
             <p:nvPr/>
           </p:nvSpPr>
@@ -13327,7 +14326,7 @@
         </p:sp>
         <p:sp>
           <p:nvSpPr>
-            <p:cNvPr id="4" name="Rectangle 3"/>
+            <p:cNvPr id="5" name="Rectangle 4"/>
             <p:cNvSpPr/>
             <p:nvPr/>
           </p:nvSpPr>
@@ -13373,7 +14372,7 @@
         </p:sp>
         <p:sp>
           <p:nvSpPr>
-            <p:cNvPr id="5" name="Rectangle 4"/>
+            <p:cNvPr id="6" name="Rectangle 5"/>
             <p:cNvSpPr/>
             <p:nvPr/>
           </p:nvSpPr>
@@ -13419,7 +14418,7 @@
         </p:sp>
         <p:sp>
           <p:nvSpPr>
-            <p:cNvPr id="6" name="Rectangle 5"/>
+            <p:cNvPr id="7" name="Rectangle 6"/>
             <p:cNvSpPr/>
             <p:nvPr/>
           </p:nvSpPr>
@@ -13465,7 +14464,7 @@
         </p:sp>
         <p:sp>
           <p:nvSpPr>
-            <p:cNvPr id="7" name="Rectangle 6"/>
+            <p:cNvPr id="8" name="Rectangle 7"/>
             <p:cNvSpPr/>
             <p:nvPr/>
           </p:nvSpPr>
@@ -13511,7 +14510,7 @@
         </p:sp>
         <p:sp>
           <p:nvSpPr>
-            <p:cNvPr id="8" name="Rectangle 7"/>
+            <p:cNvPr id="9" name="Rectangle 8"/>
             <p:cNvSpPr/>
             <p:nvPr/>
           </p:nvSpPr>
@@ -13557,7 +14556,7 @@
         </p:sp>
         <p:sp>
           <p:nvSpPr>
-            <p:cNvPr id="9" name="TextBox 8"/>
+            <p:cNvPr id="10" name="TextBox 9"/>
             <p:cNvSpPr txBox="1"/>
             <p:nvPr/>
           </p:nvSpPr>
@@ -13592,7 +14591,7 @@
       </p:grpSp>
       <p:sp>
         <p:nvSpPr>
-          <p:cNvPr id="10" name="TextBox 9"/>
+          <p:cNvPr id="11" name="TextBox 10"/>
           <p:cNvSpPr txBox="1"/>
           <p:nvPr/>
         </p:nvSpPr>
@@ -13626,7 +14625,7 @@
       </p:sp>
       <p:sp>
         <p:nvSpPr>
-          <p:cNvPr id="11" name="TextBox 10"/>
+          <p:cNvPr id="12" name="TextBox 11"/>
           <p:cNvSpPr txBox="1"/>
           <p:nvPr/>
         </p:nvSpPr>
@@ -13697,14 +14696,40 @@
       <p:grpSpPr/>
       <p:sp>
         <p:nvSpPr>
-          <p:cNvPr id="2" name="TextBox 1"/>
+          <p:cNvPr id="2" name="Title 1"/>
+          <p:cNvSpPr>
+            <a:spLocks noGrp="1"/>
+          </p:cNvSpPr>
+          <p:nvPr>
+            <p:ph type="title"/>
+          </p:nvPr>
+        </p:nvSpPr>
+        <p:spPr>
+          <a:xfrm>
+            <a:off x="-12191695" y="0"/>
+            <a:ext cx="12191695" cy="914400"/>
+          </a:xfrm>
+        </p:spPr>
+        <p:txBody>
+          <a:bodyPr/>
+          <a:lstStyle/>
+          <a:p>
+            <a:r>
+              <a:t>Then and now</a:t>
+            </a:r>
+          </a:p>
+        </p:txBody>
+      </p:sp>
+      <p:sp>
+        <p:nvSpPr>
+          <p:cNvPr id="3" name="TextBox 2"/>
           <p:cNvSpPr txBox="1"/>
           <p:nvPr/>
         </p:nvSpPr>
         <p:spPr>
           <a:xfrm>
-            <a:off x="731520" y="1463040"/>
-            <a:ext cx="10728655" cy="2926080"/>
+            <a:off x="274320" y="1417320"/>
+            <a:ext cx="11643055" cy="4023360"/>
           </a:xfrm>
           <a:prstGeom prst="rect">
             <a:avLst/>
@@ -13729,7 +14754,11 @@
             </a:r>
           </a:p>
           <a:p>
-            <a:pPr algn="ctr"/>
+            <a:pPr algn="ctr">
+              <a:spcBef>
+                <a:spcPts val="1000"/>
+              </a:spcBef>
+            </a:pPr>
             <a:r>
               <a:rPr sz="2800" b="0" i="0">
                 <a:solidFill>
